--- a/MASTER DEF Breakdown Template.pptx
+++ b/MASTER DEF Breakdown Template.pptx
@@ -3324,14 +3324,14 @@
           <p:nvPr>
             <p:extLst>
               <p:ext uri="{D42A27DB-BD31-4B8C-83A1-F6EECF244321}">
-                <p14:modId xmlns:p14="http://schemas.microsoft.com/office/powerpoint/2010/main" val="2275945881"/>
+                <p14:modId xmlns:p14="http://schemas.microsoft.com/office/powerpoint/2010/main" val="3839370929"/>
               </p:ext>
             </p:extLst>
           </p:nvPr>
         </p:nvGraphicFramePr>
         <p:xfrm>
           <a:off x="254000" y="889000"/>
-          <a:ext cx="5461000" cy="3011594"/>
+          <a:ext cx="5461000" cy="2970954"/>
         </p:xfrm>
         <a:graphic>
           <a:graphicData uri="http://schemas.openxmlformats.org/drawingml/2006/table">
@@ -3370,7 +3370,7 @@
                     <a:p>
                       <a:pPr algn="ctr"/>
                       <a:r>
-                        <a:rPr dirty="0">
+                        <a:rPr sz="1800" b="1" dirty="0">
                           <a:solidFill>
                             <a:srgbClr val="FFFFFF"/>
                           </a:solidFill>
@@ -3379,7 +3379,7 @@
                       </a:r>
                     </a:p>
                   </a:txBody>
-                  <a:tcPr>
+                  <a:tcPr marL="50800" marR="50800" marT="25400" marB="25400" anchor="ctr">
                     <a:solidFill>
                       <a:srgbClr val="BE0000"/>
                     </a:solidFill>
@@ -3392,7 +3392,7 @@
                     <a:p>
                       <a:pPr algn="ctr"/>
                       <a:r>
-                        <a:rPr>
+                        <a:rPr sz="1800" b="1" dirty="0">
                           <a:solidFill>
                             <a:srgbClr val="FFFFFF"/>
                           </a:solidFill>
@@ -3401,7 +3401,7 @@
                       </a:r>
                     </a:p>
                   </a:txBody>
-                  <a:tcPr>
+                  <a:tcPr marL="50800" marR="50800" marT="25400" marB="25400" anchor="ctr">
                     <a:solidFill>
                       <a:srgbClr val="BE0000"/>
                     </a:solidFill>
@@ -3414,7 +3414,7 @@
                     <a:p>
                       <a:pPr algn="ctr"/>
                       <a:r>
-                        <a:rPr>
+                        <a:rPr sz="1800" b="1" dirty="0">
                           <a:solidFill>
                             <a:srgbClr val="FFFFFF"/>
                           </a:solidFill>
@@ -3423,7 +3423,7 @@
                       </a:r>
                     </a:p>
                   </a:txBody>
-                  <a:tcPr>
+                  <a:tcPr marL="50800" marR="50800" marT="25400" marB="25400" anchor="ctr">
                     <a:solidFill>
                       <a:srgbClr val="BE0000"/>
                     </a:solidFill>
@@ -3443,12 +3443,16 @@
                     <a:p>
                       <a:pPr algn="ctr"/>
                       <a:r>
-                        <a:rPr sz="1400" dirty="0"/>
-                        <a:t>Top 5 Fronts</a:t>
-                      </a:r>
-                    </a:p>
-                  </a:txBody>
-                  <a:tcPr>
+                        <a:rPr sz="1800" b="0">
+                          <a:solidFill>
+                            <a:srgbClr val="000000"/>
+                          </a:solidFill>
+                        </a:rPr>
+                        <a:t>TUFF</a:t>
+                      </a:r>
+                    </a:p>
+                  </a:txBody>
+                  <a:tcPr marL="50800" marR="50800" marT="25400" marB="25400" anchor="ctr">
                     <a:solidFill>
                       <a:srgbClr val="F2F2F2"/>
                     </a:solidFill>
@@ -3460,10 +3464,17 @@
                     <a:lstStyle/>
                     <a:p>
                       <a:pPr algn="ctr"/>
-                      <a:endParaRPr sz="1400" dirty="0"/>
-                    </a:p>
-                  </a:txBody>
-                  <a:tcPr>
+                      <a:r>
+                        <a:rPr sz="1800" b="0" dirty="0">
+                          <a:solidFill>
+                            <a:srgbClr val="000000"/>
+                          </a:solidFill>
+                        </a:rPr>
+                        <a:t>70</a:t>
+                      </a:r>
+                    </a:p>
+                  </a:txBody>
+                  <a:tcPr marL="50800" marR="50800" marT="25400" marB="25400" anchor="ctr">
                     <a:solidFill>
                       <a:srgbClr val="F2F2F2"/>
                     </a:solidFill>
@@ -3475,10 +3486,17 @@
                     <a:lstStyle/>
                     <a:p>
                       <a:pPr algn="ctr"/>
-                      <a:endParaRPr sz="1400"/>
-                    </a:p>
-                  </a:txBody>
-                  <a:tcPr>
+                      <a:r>
+                        <a:rPr sz="1800" b="0" dirty="0">
+                          <a:solidFill>
+                            <a:srgbClr val="000000"/>
+                          </a:solidFill>
+                        </a:rPr>
+                        <a:t>42.7%</a:t>
+                      </a:r>
+                    </a:p>
+                  </a:txBody>
+                  <a:tcPr marL="50800" marR="50800" marT="25400" marB="25400" anchor="ctr">
                     <a:solidFill>
                       <a:srgbClr val="F2F2F2"/>
                     </a:solidFill>
@@ -3497,10 +3515,17 @@
                     <a:lstStyle/>
                     <a:p>
                       <a:pPr algn="ctr"/>
-                      <a:endParaRPr sz="1400"/>
-                    </a:p>
-                  </a:txBody>
-                  <a:tcPr>
+                      <a:r>
+                        <a:rPr sz="1800" b="0" dirty="0">
+                          <a:solidFill>
+                            <a:srgbClr val="000000"/>
+                          </a:solidFill>
+                        </a:rPr>
+                        <a:t>TITE</a:t>
+                      </a:r>
+                    </a:p>
+                  </a:txBody>
+                  <a:tcPr marL="50800" marR="50800" marT="25400" marB="25400" anchor="ctr">
                     <a:solidFill>
                       <a:srgbClr val="FFFFFF"/>
                     </a:solidFill>
@@ -3512,10 +3537,17 @@
                     <a:lstStyle/>
                     <a:p>
                       <a:pPr algn="ctr"/>
-                      <a:endParaRPr sz="1400" dirty="0"/>
-                    </a:p>
-                  </a:txBody>
-                  <a:tcPr>
+                      <a:r>
+                        <a:rPr sz="1800" b="0" dirty="0">
+                          <a:solidFill>
+                            <a:srgbClr val="000000"/>
+                          </a:solidFill>
+                        </a:rPr>
+                        <a:t>33</a:t>
+                      </a:r>
+                    </a:p>
+                  </a:txBody>
+                  <a:tcPr marL="50800" marR="50800" marT="25400" marB="25400" anchor="ctr">
                     <a:solidFill>
                       <a:srgbClr val="FFFFFF"/>
                     </a:solidFill>
@@ -3527,10 +3559,17 @@
                     <a:lstStyle/>
                     <a:p>
                       <a:pPr algn="ctr"/>
-                      <a:endParaRPr sz="1400"/>
-                    </a:p>
-                  </a:txBody>
-                  <a:tcPr>
+                      <a:r>
+                        <a:rPr sz="1800" b="0" dirty="0">
+                          <a:solidFill>
+                            <a:srgbClr val="000000"/>
+                          </a:solidFill>
+                        </a:rPr>
+                        <a:t>20.1%</a:t>
+                      </a:r>
+                    </a:p>
+                  </a:txBody>
+                  <a:tcPr marL="50800" marR="50800" marT="25400" marB="25400" anchor="ctr">
                     <a:solidFill>
                       <a:srgbClr val="FFFFFF"/>
                     </a:solidFill>
@@ -3549,10 +3588,17 @@
                     <a:lstStyle/>
                     <a:p>
                       <a:pPr algn="ctr"/>
-                      <a:endParaRPr sz="1400"/>
-                    </a:p>
-                  </a:txBody>
-                  <a:tcPr>
+                      <a:r>
+                        <a:rPr sz="1800" b="0">
+                          <a:solidFill>
+                            <a:srgbClr val="000000"/>
+                          </a:solidFill>
+                        </a:rPr>
+                        <a:t>404</a:t>
+                      </a:r>
+                    </a:p>
+                  </a:txBody>
+                  <a:tcPr marL="50800" marR="50800" marT="25400" marB="25400" anchor="ctr">
                     <a:solidFill>
                       <a:srgbClr val="F2F2F2"/>
                     </a:solidFill>
@@ -3564,10 +3610,17 @@
                     <a:lstStyle/>
                     <a:p>
                       <a:pPr algn="ctr"/>
-                      <a:endParaRPr sz="1400" dirty="0"/>
-                    </a:p>
-                  </a:txBody>
-                  <a:tcPr>
+                      <a:r>
+                        <a:rPr sz="1800" b="0">
+                          <a:solidFill>
+                            <a:srgbClr val="000000"/>
+                          </a:solidFill>
+                        </a:rPr>
+                        <a:t>15</a:t>
+                      </a:r>
+                    </a:p>
+                  </a:txBody>
+                  <a:tcPr marL="50800" marR="50800" marT="25400" marB="25400" anchor="ctr">
                     <a:solidFill>
                       <a:srgbClr val="F2F2F2"/>
                     </a:solidFill>
@@ -3579,10 +3632,17 @@
                     <a:lstStyle/>
                     <a:p>
                       <a:pPr algn="ctr"/>
-                      <a:endParaRPr sz="1400" dirty="0"/>
-                    </a:p>
-                  </a:txBody>
-                  <a:tcPr>
+                      <a:r>
+                        <a:rPr sz="1800" b="0" dirty="0">
+                          <a:solidFill>
+                            <a:srgbClr val="000000"/>
+                          </a:solidFill>
+                        </a:rPr>
+                        <a:t>9.1%</a:t>
+                      </a:r>
+                    </a:p>
+                  </a:txBody>
+                  <a:tcPr marL="50800" marR="50800" marT="25400" marB="25400" anchor="ctr">
                     <a:solidFill>
                       <a:srgbClr val="F2F2F2"/>
                     </a:solidFill>
@@ -3601,10 +3661,17 @@
                     <a:lstStyle/>
                     <a:p>
                       <a:pPr algn="ctr"/>
-                      <a:endParaRPr sz="1400"/>
-                    </a:p>
-                  </a:txBody>
-                  <a:tcPr>
+                      <a:r>
+                        <a:rPr sz="1800" b="0">
+                          <a:solidFill>
+                            <a:srgbClr val="000000"/>
+                          </a:solidFill>
+                        </a:rPr>
+                        <a:t>RNR</a:t>
+                      </a:r>
+                    </a:p>
+                  </a:txBody>
+                  <a:tcPr marL="50800" marR="50800" marT="25400" marB="25400" anchor="ctr">
                     <a:solidFill>
                       <a:srgbClr val="FFFFFF"/>
                     </a:solidFill>
@@ -3616,10 +3683,17 @@
                     <a:lstStyle/>
                     <a:p>
                       <a:pPr algn="ctr"/>
-                      <a:endParaRPr sz="1400" dirty="0"/>
-                    </a:p>
-                  </a:txBody>
-                  <a:tcPr>
+                      <a:r>
+                        <a:rPr sz="1800" b="0">
+                          <a:solidFill>
+                            <a:srgbClr val="000000"/>
+                          </a:solidFill>
+                        </a:rPr>
+                        <a:t>10</a:t>
+                      </a:r>
+                    </a:p>
+                  </a:txBody>
+                  <a:tcPr marL="50800" marR="50800" marT="25400" marB="25400" anchor="ctr">
                     <a:solidFill>
                       <a:srgbClr val="FFFFFF"/>
                     </a:solidFill>
@@ -3631,10 +3705,17 @@
                     <a:lstStyle/>
                     <a:p>
                       <a:pPr algn="ctr"/>
-                      <a:endParaRPr sz="1400" dirty="0"/>
-                    </a:p>
-                  </a:txBody>
-                  <a:tcPr>
+                      <a:r>
+                        <a:rPr sz="1800" b="0" dirty="0">
+                          <a:solidFill>
+                            <a:srgbClr val="000000"/>
+                          </a:solidFill>
+                        </a:rPr>
+                        <a:t>6.1%</a:t>
+                      </a:r>
+                    </a:p>
+                  </a:txBody>
+                  <a:tcPr marL="50800" marR="50800" marT="25400" marB="25400" anchor="ctr">
                     <a:solidFill>
                       <a:srgbClr val="FFFFFF"/>
                     </a:solidFill>
@@ -3653,10 +3734,17 @@
                     <a:lstStyle/>
                     <a:p>
                       <a:pPr algn="ctr"/>
-                      <a:endParaRPr sz="1400"/>
-                    </a:p>
-                  </a:txBody>
-                  <a:tcPr>
+                      <a:r>
+                        <a:rPr sz="1800" b="0">
+                          <a:solidFill>
+                            <a:srgbClr val="000000"/>
+                          </a:solidFill>
+                        </a:rPr>
+                        <a:t>G'S</a:t>
+                      </a:r>
+                    </a:p>
+                  </a:txBody>
+                  <a:tcPr marL="50800" marR="50800" marT="25400" marB="25400" anchor="ctr">
                     <a:solidFill>
                       <a:srgbClr val="F2F2F2"/>
                     </a:solidFill>
@@ -3668,10 +3756,17 @@
                     <a:lstStyle/>
                     <a:p>
                       <a:pPr algn="ctr"/>
-                      <a:endParaRPr sz="1400"/>
-                    </a:p>
-                  </a:txBody>
-                  <a:tcPr>
+                      <a:r>
+                        <a:rPr sz="1800" b="0">
+                          <a:solidFill>
+                            <a:srgbClr val="000000"/>
+                          </a:solidFill>
+                        </a:rPr>
+                        <a:t>6</a:t>
+                      </a:r>
+                    </a:p>
+                  </a:txBody>
+                  <a:tcPr marL="50800" marR="50800" marT="25400" marB="25400" anchor="ctr">
                     <a:solidFill>
                       <a:srgbClr val="F2F2F2"/>
                     </a:solidFill>
@@ -3683,10 +3778,17 @@
                     <a:lstStyle/>
                     <a:p>
                       <a:pPr algn="ctr"/>
-                      <a:endParaRPr sz="1400" dirty="0"/>
-                    </a:p>
-                  </a:txBody>
-                  <a:tcPr>
+                      <a:r>
+                        <a:rPr sz="1800" b="0" dirty="0">
+                          <a:solidFill>
+                            <a:srgbClr val="000000"/>
+                          </a:solidFill>
+                        </a:rPr>
+                        <a:t>3.7%</a:t>
+                      </a:r>
+                    </a:p>
+                  </a:txBody>
+                  <a:tcPr marL="50800" marR="50800" marT="25400" marB="25400" anchor="ctr">
                     <a:solidFill>
                       <a:srgbClr val="F2F2F2"/>
                     </a:solidFill>
@@ -3704,115 +3806,6 @@
       </p:graphicFrame>
       <p:sp>
         <p:nvSpPr>
-          <p:cNvPr id="8" name="TextBox 7"/>
-          <p:cNvSpPr txBox="1"/>
-          <p:nvPr/>
-        </p:nvSpPr>
-        <p:spPr>
-          <a:xfrm>
-            <a:off x="5969000" y="889000"/>
-            <a:ext cx="2921000" cy="3175000"/>
-          </a:xfrm>
-          <a:prstGeom prst="rect">
-            <a:avLst/>
-          </a:prstGeom>
-          <a:noFill/>
-        </p:spPr>
-        <p:txBody>
-          <a:bodyPr wrap="none">
-            <a:spAutoFit/>
-          </a:bodyPr>
-          <a:lstStyle/>
-          <a:p>
-            <a:pPr>
-              <a:defRPr sz="1600" b="1"/>
-            </a:pPr>
-            <a:r>
-              <a:t>Key Takeaways</a:t>
-            </a:r>
-          </a:p>
-          <a:p>
-            <a:pPr lvl="1">
-              <a:defRPr sz="1200"/>
-            </a:pPr>
-            <a:r>
-              <a:t>🔥 Highlight tendencies ≥60%</a:t>
-            </a:r>
-          </a:p>
-          <a:p>
-            <a:pPr lvl="1">
-              <a:defRPr sz="1200"/>
-            </a:pPr>
-            <a:r>
-              <a:t>⚠️ Pressure alerts</a:t>
-            </a:r>
-          </a:p>
-          <a:p>
-            <a:pPr lvl="1">
-              <a:defRPr sz="1200"/>
-            </a:pPr>
-            <a:r>
-              <a:t>🛑 Red zone notes</a:t>
-            </a:r>
-          </a:p>
-          <a:p>
-            <a:pPr lvl="1">
-              <a:defRPr sz="1200"/>
-            </a:pPr>
-            <a:r>
-              <a:t>AI-generated summary</a:t>
-            </a:r>
-          </a:p>
-        </p:txBody>
-      </p:sp>
-      <p:sp>
-        <p:nvSpPr>
-          <p:cNvPr id="9" name="Oval 8"/>
-          <p:cNvSpPr/>
-          <p:nvPr/>
-        </p:nvSpPr>
-        <p:spPr>
-          <a:xfrm>
-            <a:off x="6350000" y="3175000"/>
-            <a:ext cx="1905000" cy="1905000"/>
-          </a:xfrm>
-          <a:prstGeom prst="ellipse">
-            <a:avLst/>
-          </a:prstGeom>
-          <a:noFill/>
-          <a:ln>
-            <a:solidFill>
-              <a:srgbClr val="BE0000"/>
-            </a:solidFill>
-          </a:ln>
-        </p:spPr>
-        <p:style>
-          <a:lnRef idx="1">
-            <a:schemeClr val="accent1"/>
-          </a:lnRef>
-          <a:fillRef idx="3">
-            <a:schemeClr val="accent1"/>
-          </a:fillRef>
-          <a:effectRef idx="2">
-            <a:schemeClr val="accent1"/>
-          </a:effectRef>
-          <a:fontRef idx="minor">
-            <a:schemeClr val="lt1"/>
-          </a:fontRef>
-        </p:style>
-        <p:txBody>
-          <a:bodyPr rtlCol="0" anchor="ctr"/>
-          <a:lstStyle/>
-          <a:p>
-            <a:r>
-              <a:rPr dirty="0"/>
-              <a:t>Pie Chart</a:t>
-            </a:r>
-          </a:p>
-        </p:txBody>
-      </p:sp>
-      <p:sp>
-        <p:nvSpPr>
           <p:cNvPr id="11" name="TextBox 10">
             <a:extLst>
               <a:ext uri="{FF2B5EF4-FFF2-40B4-BE49-F238E27FC236}">
@@ -3840,11 +3833,14 @@
           <a:lstStyle/>
           <a:p>
             <a:pPr>
-              <a:defRPr sz="1100"/>
+              <a:defRPr sz="1100">
+                <a:solidFill>
+                  <a:srgbClr val="000000"/>
+                </a:solidFill>
+              </a:defRPr>
             </a:pPr>
             <a:r>
-              <a:rPr dirty="0"/>
-              <a:t>Opponent: ____________</a:t>
+              <a:t>Opponent: River Falls    Date: 07/30/2026</a:t>
             </a:r>
           </a:p>
         </p:txBody>
@@ -4010,14 +4006,14 @@
           <p:nvPr>
             <p:extLst>
               <p:ext uri="{D42A27DB-BD31-4B8C-83A1-F6EECF244321}">
-                <p14:modId xmlns:p14="http://schemas.microsoft.com/office/powerpoint/2010/main" val="587233692"/>
+                <p14:modId xmlns:p14="http://schemas.microsoft.com/office/powerpoint/2010/main" val="2960909969"/>
               </p:ext>
             </p:extLst>
           </p:nvPr>
         </p:nvGraphicFramePr>
         <p:xfrm>
-          <a:off x="254000" y="889000"/>
-          <a:ext cx="5461000" cy="3427308"/>
+          <a:off x="433125" y="889000"/>
+          <a:ext cx="8277750" cy="3001434"/>
         </p:xfrm>
         <a:graphic>
           <a:graphicData uri="http://schemas.openxmlformats.org/drawingml/2006/table">
@@ -4026,35 +4022,35 @@
                 <a:tableStyleId>{5C22544A-7EE6-4342-B048-85BDC9FD1C3A}</a:tableStyleId>
               </a:tblPr>
               <a:tblGrid>
-                <a:gridCol w="1092200">
+                <a:gridCol w="1655550">
                   <a:extLst>
                     <a:ext uri="{9D8B030D-6E8A-4147-A177-3AD203B41FA5}">
                       <a16:colId xmlns:a16="http://schemas.microsoft.com/office/drawing/2014/main" val="20000"/>
                     </a:ext>
                   </a:extLst>
                 </a:gridCol>
-                <a:gridCol w="1092200">
+                <a:gridCol w="1655550">
                   <a:extLst>
                     <a:ext uri="{9D8B030D-6E8A-4147-A177-3AD203B41FA5}">
                       <a16:colId xmlns:a16="http://schemas.microsoft.com/office/drawing/2014/main" val="20001"/>
                     </a:ext>
                   </a:extLst>
                 </a:gridCol>
-                <a:gridCol w="1092200">
+                <a:gridCol w="1655550">
                   <a:extLst>
                     <a:ext uri="{9D8B030D-6E8A-4147-A177-3AD203B41FA5}">
                       <a16:colId xmlns:a16="http://schemas.microsoft.com/office/drawing/2014/main" val="20002"/>
                     </a:ext>
                   </a:extLst>
                 </a:gridCol>
-                <a:gridCol w="1092200">
+                <a:gridCol w="1655550">
                   <a:extLst>
                     <a:ext uri="{9D8B030D-6E8A-4147-A177-3AD203B41FA5}">
                       <a16:colId xmlns:a16="http://schemas.microsoft.com/office/drawing/2014/main" val="20003"/>
                     </a:ext>
                   </a:extLst>
                 </a:gridCol>
-                <a:gridCol w="1092200">
+                <a:gridCol w="1655550">
                   <a:extLst>
                     <a:ext uri="{9D8B030D-6E8A-4147-A177-3AD203B41FA5}">
                       <a16:colId xmlns:a16="http://schemas.microsoft.com/office/drawing/2014/main" val="20004"/>
@@ -4070,7 +4066,7 @@
                     <a:p>
                       <a:pPr algn="ctr"/>
                       <a:r>
-                        <a:rPr dirty="0">
+                        <a:rPr sz="2000" b="1" dirty="0">
                           <a:solidFill>
                             <a:srgbClr val="FFFFFF"/>
                           </a:solidFill>
@@ -4079,7 +4075,7 @@
                       </a:r>
                     </a:p>
                   </a:txBody>
-                  <a:tcPr>
+                  <a:tcPr marL="50800" marR="50800" marT="25400" marB="25400" anchor="ctr">
                     <a:solidFill>
                       <a:srgbClr val="BE0000"/>
                     </a:solidFill>
@@ -4092,7 +4088,7 @@
                     <a:p>
                       <a:pPr algn="ctr"/>
                       <a:r>
-                        <a:rPr>
+                        <a:rPr sz="2000" b="1">
                           <a:solidFill>
                             <a:srgbClr val="FFFFFF"/>
                           </a:solidFill>
@@ -4101,7 +4097,7 @@
                       </a:r>
                     </a:p>
                   </a:txBody>
-                  <a:tcPr>
+                  <a:tcPr marL="50800" marR="50800" marT="25400" marB="25400" anchor="ctr">
                     <a:solidFill>
                       <a:srgbClr val="BE0000"/>
                     </a:solidFill>
@@ -4114,7 +4110,7 @@
                     <a:p>
                       <a:pPr algn="ctr"/>
                       <a:r>
-                        <a:rPr>
+                        <a:rPr sz="2000" b="1">
                           <a:solidFill>
                             <a:srgbClr val="FFFFFF"/>
                           </a:solidFill>
@@ -4123,7 +4119,7 @@
                       </a:r>
                     </a:p>
                   </a:txBody>
-                  <a:tcPr>
+                  <a:tcPr marL="50800" marR="50800" marT="25400" marB="25400" anchor="ctr">
                     <a:solidFill>
                       <a:srgbClr val="BE0000"/>
                     </a:solidFill>
@@ -4136,7 +4132,7 @@
                     <a:p>
                       <a:pPr algn="ctr"/>
                       <a:r>
-                        <a:rPr>
+                        <a:rPr sz="2000" b="1">
                           <a:solidFill>
                             <a:srgbClr val="FFFFFF"/>
                           </a:solidFill>
@@ -4145,7 +4141,7 @@
                       </a:r>
                     </a:p>
                   </a:txBody>
-                  <a:tcPr>
+                  <a:tcPr marL="50800" marR="50800" marT="25400" marB="25400" anchor="ctr">
                     <a:solidFill>
                       <a:srgbClr val="BE0000"/>
                     </a:solidFill>
@@ -4158,7 +4154,7 @@
                     <a:p>
                       <a:pPr algn="ctr"/>
                       <a:r>
-                        <a:rPr>
+                        <a:rPr sz="2000" b="1">
                           <a:solidFill>
                             <a:srgbClr val="FFFFFF"/>
                           </a:solidFill>
@@ -4167,7 +4163,7 @@
                       </a:r>
                     </a:p>
                   </a:txBody>
-                  <a:tcPr>
+                  <a:tcPr marL="50800" marR="50800" marT="25400" marB="25400" anchor="ctr">
                     <a:solidFill>
                       <a:srgbClr val="BE0000"/>
                     </a:solidFill>
@@ -4187,12 +4183,16 @@
                     <a:p>
                       <a:pPr algn="ctr"/>
                       <a:r>
-                        <a:rPr sz="1400" dirty="0"/>
-                        <a:t>Top 5 Blitzes (exclude blank blitzes)</a:t>
-                      </a:r>
-                    </a:p>
-                  </a:txBody>
-                  <a:tcPr>
+                        <a:rPr sz="1800" b="0">
+                          <a:solidFill>
+                            <a:srgbClr val="000000"/>
+                          </a:solidFill>
+                        </a:rPr>
+                        <a:t>SNAKE</a:t>
+                      </a:r>
+                    </a:p>
+                  </a:txBody>
+                  <a:tcPr marL="50800" marR="50800" marT="25400" marB="25400" anchor="ctr">
                     <a:solidFill>
                       <a:srgbClr val="F2F2F2"/>
                     </a:solidFill>
@@ -4204,10 +4204,17 @@
                     <a:lstStyle/>
                     <a:p>
                       <a:pPr algn="ctr"/>
-                      <a:endParaRPr sz="1400" dirty="0"/>
-                    </a:p>
-                  </a:txBody>
-                  <a:tcPr>
+                      <a:r>
+                        <a:rPr sz="1800" b="0" dirty="0">
+                          <a:solidFill>
+                            <a:srgbClr val="000000"/>
+                          </a:solidFill>
+                        </a:rPr>
+                        <a:t>19</a:t>
+                      </a:r>
+                    </a:p>
+                  </a:txBody>
+                  <a:tcPr marL="50800" marR="50800" marT="25400" marB="25400" anchor="ctr">
                     <a:solidFill>
                       <a:srgbClr val="F2F2F2"/>
                     </a:solidFill>
@@ -4219,10 +4226,17 @@
                     <a:lstStyle/>
                     <a:p>
                       <a:pPr algn="ctr"/>
-                      <a:endParaRPr sz="1400" dirty="0"/>
-                    </a:p>
-                  </a:txBody>
-                  <a:tcPr>
+                      <a:r>
+                        <a:rPr sz="1800" b="0" dirty="0">
+                          <a:solidFill>
+                            <a:srgbClr val="000000"/>
+                          </a:solidFill>
+                        </a:rPr>
+                        <a:t>11.6%</a:t>
+                      </a:r>
+                    </a:p>
+                  </a:txBody>
+                  <a:tcPr marL="50800" marR="50800" marT="25400" marB="25400" anchor="ctr">
                     <a:solidFill>
                       <a:srgbClr val="F2F2F2"/>
                     </a:solidFill>
@@ -4234,10 +4248,17 @@
                     <a:lstStyle/>
                     <a:p>
                       <a:pPr algn="ctr"/>
-                      <a:endParaRPr sz="1400"/>
-                    </a:p>
-                  </a:txBody>
-                  <a:tcPr>
+                      <a:r>
+                        <a:rPr sz="1800" b="0">
+                          <a:solidFill>
+                            <a:srgbClr val="000000"/>
+                          </a:solidFill>
+                        </a:rPr>
+                        <a:t>CRASH</a:t>
+                      </a:r>
+                    </a:p>
+                  </a:txBody>
+                  <a:tcPr marL="50800" marR="50800" marT="25400" marB="25400" anchor="ctr">
                     <a:solidFill>
                       <a:srgbClr val="F2F2F2"/>
                     </a:solidFill>
@@ -4249,10 +4270,17 @@
                     <a:lstStyle/>
                     <a:p>
                       <a:pPr algn="ctr"/>
-                      <a:endParaRPr sz="1400"/>
-                    </a:p>
-                  </a:txBody>
-                  <a:tcPr>
+                      <a:r>
+                        <a:rPr sz="1800" b="1">
+                          <a:solidFill>
+                            <a:srgbClr val="BE0000"/>
+                          </a:solidFill>
+                        </a:rPr>
+                        <a:t>63.2%</a:t>
+                      </a:r>
+                    </a:p>
+                  </a:txBody>
+                  <a:tcPr marL="50800" marR="50800" marT="25400" marB="25400" anchor="ctr">
                     <a:solidFill>
                       <a:srgbClr val="F2F2F2"/>
                     </a:solidFill>
@@ -4272,12 +4300,16 @@
                     <a:p>
                       <a:pPr algn="ctr"/>
                       <a:r>
-                        <a:rPr sz="1400"/>
-                        <a:t>Associated Stunts</a:t>
-                      </a:r>
-                    </a:p>
-                  </a:txBody>
-                  <a:tcPr>
+                        <a:rPr sz="1800" b="0">
+                          <a:solidFill>
+                            <a:srgbClr val="000000"/>
+                          </a:solidFill>
+                        </a:rPr>
+                        <a:t>RAM X</a:t>
+                      </a:r>
+                    </a:p>
+                  </a:txBody>
+                  <a:tcPr marL="50800" marR="50800" marT="25400" marB="25400" anchor="ctr">
                     <a:solidFill>
                       <a:srgbClr val="FFFFFF"/>
                     </a:solidFill>
@@ -4289,10 +4321,17 @@
                     <a:lstStyle/>
                     <a:p>
                       <a:pPr algn="ctr"/>
-                      <a:endParaRPr sz="1400"/>
-                    </a:p>
-                  </a:txBody>
-                  <a:tcPr>
+                      <a:r>
+                        <a:rPr sz="1800" b="0">
+                          <a:solidFill>
+                            <a:srgbClr val="000000"/>
+                          </a:solidFill>
+                        </a:rPr>
+                        <a:t>9</a:t>
+                      </a:r>
+                    </a:p>
+                  </a:txBody>
+                  <a:tcPr marL="50800" marR="50800" marT="25400" marB="25400" anchor="ctr">
                     <a:solidFill>
                       <a:srgbClr val="FFFFFF"/>
                     </a:solidFill>
@@ -4304,10 +4343,17 @@
                     <a:lstStyle/>
                     <a:p>
                       <a:pPr algn="ctr"/>
-                      <a:endParaRPr sz="1400"/>
-                    </a:p>
-                  </a:txBody>
-                  <a:tcPr>
+                      <a:r>
+                        <a:rPr sz="1800" b="0">
+                          <a:solidFill>
+                            <a:srgbClr val="000000"/>
+                          </a:solidFill>
+                        </a:rPr>
+                        <a:t>5.5%</a:t>
+                      </a:r>
+                    </a:p>
+                  </a:txBody>
+                  <a:tcPr marL="50800" marR="50800" marT="25400" marB="25400" anchor="ctr">
                     <a:solidFill>
                       <a:srgbClr val="FFFFFF"/>
                     </a:solidFill>
@@ -4319,10 +4365,17 @@
                     <a:lstStyle/>
                     <a:p>
                       <a:pPr algn="ctr"/>
-                      <a:endParaRPr sz="1400" dirty="0"/>
-                    </a:p>
-                  </a:txBody>
-                  <a:tcPr>
+                      <a:r>
+                        <a:rPr sz="1800" b="0">
+                          <a:solidFill>
+                            <a:srgbClr val="000000"/>
+                          </a:solidFill>
+                        </a:rPr>
+                        <a:t>SLANT WEAK</a:t>
+                      </a:r>
+                    </a:p>
+                  </a:txBody>
+                  <a:tcPr marL="50800" marR="50800" marT="25400" marB="25400" anchor="ctr">
                     <a:solidFill>
                       <a:srgbClr val="FFFFFF"/>
                     </a:solidFill>
@@ -4334,10 +4387,17 @@
                     <a:lstStyle/>
                     <a:p>
                       <a:pPr algn="ctr"/>
-                      <a:endParaRPr sz="1400"/>
-                    </a:p>
-                  </a:txBody>
-                  <a:tcPr>
+                      <a:r>
+                        <a:rPr sz="1800" b="1">
+                          <a:solidFill>
+                            <a:srgbClr val="BE0000"/>
+                          </a:solidFill>
+                        </a:rPr>
+                        <a:t>100.0%</a:t>
+                      </a:r>
+                    </a:p>
+                  </a:txBody>
+                  <a:tcPr marL="50800" marR="50800" marT="25400" marB="25400" anchor="ctr">
                     <a:solidFill>
                       <a:srgbClr val="FFFFFF"/>
                     </a:solidFill>
@@ -4356,10 +4416,17 @@
                     <a:lstStyle/>
                     <a:p>
                       <a:pPr algn="ctr"/>
-                      <a:endParaRPr sz="1400"/>
-                    </a:p>
-                  </a:txBody>
-                  <a:tcPr>
+                      <a:r>
+                        <a:rPr sz="1800" b="0">
+                          <a:solidFill>
+                            <a:srgbClr val="000000"/>
+                          </a:solidFill>
+                        </a:rPr>
+                        <a:t>RATTLE</a:t>
+                      </a:r>
+                    </a:p>
+                  </a:txBody>
+                  <a:tcPr marL="50800" marR="50800" marT="25400" marB="25400" anchor="ctr">
                     <a:solidFill>
                       <a:srgbClr val="F2F2F2"/>
                     </a:solidFill>
@@ -4371,10 +4438,17 @@
                     <a:lstStyle/>
                     <a:p>
                       <a:pPr algn="ctr"/>
-                      <a:endParaRPr sz="1400"/>
-                    </a:p>
-                  </a:txBody>
-                  <a:tcPr>
+                      <a:r>
+                        <a:rPr sz="1800" b="0">
+                          <a:solidFill>
+                            <a:srgbClr val="000000"/>
+                          </a:solidFill>
+                        </a:rPr>
+                        <a:t>7</a:t>
+                      </a:r>
+                    </a:p>
+                  </a:txBody>
+                  <a:tcPr marL="50800" marR="50800" marT="25400" marB="25400" anchor="ctr">
                     <a:solidFill>
                       <a:srgbClr val="F2F2F2"/>
                     </a:solidFill>
@@ -4386,10 +4460,17 @@
                     <a:lstStyle/>
                     <a:p>
                       <a:pPr algn="ctr"/>
-                      <a:endParaRPr sz="1400"/>
-                    </a:p>
-                  </a:txBody>
-                  <a:tcPr>
+                      <a:r>
+                        <a:rPr sz="1800" b="0">
+                          <a:solidFill>
+                            <a:srgbClr val="000000"/>
+                          </a:solidFill>
+                        </a:rPr>
+                        <a:t>4.3%</a:t>
+                      </a:r>
+                    </a:p>
+                  </a:txBody>
+                  <a:tcPr marL="50800" marR="50800" marT="25400" marB="25400" anchor="ctr">
                     <a:solidFill>
                       <a:srgbClr val="F2F2F2"/>
                     </a:solidFill>
@@ -4401,10 +4482,17 @@
                     <a:lstStyle/>
                     <a:p>
                       <a:pPr algn="ctr"/>
-                      <a:endParaRPr sz="1400" dirty="0"/>
-                    </a:p>
-                  </a:txBody>
-                  <a:tcPr>
+                      <a:r>
+                        <a:rPr sz="1800" b="0" dirty="0">
+                          <a:solidFill>
+                            <a:srgbClr val="000000"/>
+                          </a:solidFill>
+                        </a:rPr>
+                        <a:t>SLANT STRONG</a:t>
+                      </a:r>
+                    </a:p>
+                  </a:txBody>
+                  <a:tcPr marL="50800" marR="50800" marT="25400" marB="25400" anchor="ctr">
                     <a:solidFill>
                       <a:srgbClr val="F2F2F2"/>
                     </a:solidFill>
@@ -4416,10 +4504,17 @@
                     <a:lstStyle/>
                     <a:p>
                       <a:pPr algn="ctr"/>
-                      <a:endParaRPr sz="1400" dirty="0"/>
-                    </a:p>
-                  </a:txBody>
-                  <a:tcPr>
+                      <a:r>
+                        <a:rPr sz="1800" b="0">
+                          <a:solidFill>
+                            <a:srgbClr val="000000"/>
+                          </a:solidFill>
+                        </a:rPr>
+                        <a:t>57.1%</a:t>
+                      </a:r>
+                    </a:p>
+                  </a:txBody>
+                  <a:tcPr marL="50800" marR="50800" marT="25400" marB="25400" anchor="ctr">
                     <a:solidFill>
                       <a:srgbClr val="F2F2F2"/>
                     </a:solidFill>
@@ -4438,10 +4533,17 @@
                     <a:lstStyle/>
                     <a:p>
                       <a:pPr algn="ctr"/>
-                      <a:endParaRPr sz="1400"/>
-                    </a:p>
-                  </a:txBody>
-                  <a:tcPr>
+                      <a:r>
+                        <a:rPr sz="1800" b="0">
+                          <a:solidFill>
+                            <a:srgbClr val="000000"/>
+                          </a:solidFill>
+                        </a:rPr>
+                        <a:t>COBRA</a:t>
+                      </a:r>
+                    </a:p>
+                  </a:txBody>
+                  <a:tcPr marL="50800" marR="50800" marT="25400" marB="25400" anchor="ctr">
                     <a:solidFill>
                       <a:srgbClr val="FFFFFF"/>
                     </a:solidFill>
@@ -4453,10 +4555,17 @@
                     <a:lstStyle/>
                     <a:p>
                       <a:pPr algn="ctr"/>
-                      <a:endParaRPr sz="1400"/>
-                    </a:p>
-                  </a:txBody>
-                  <a:tcPr>
+                      <a:r>
+                        <a:rPr sz="1800" b="0">
+                          <a:solidFill>
+                            <a:srgbClr val="000000"/>
+                          </a:solidFill>
+                        </a:rPr>
+                        <a:t>7</a:t>
+                      </a:r>
+                    </a:p>
+                  </a:txBody>
+                  <a:tcPr marL="50800" marR="50800" marT="25400" marB="25400" anchor="ctr">
                     <a:solidFill>
                       <a:srgbClr val="FFFFFF"/>
                     </a:solidFill>
@@ -4468,10 +4577,17 @@
                     <a:lstStyle/>
                     <a:p>
                       <a:pPr algn="ctr"/>
-                      <a:endParaRPr sz="1400"/>
-                    </a:p>
-                  </a:txBody>
-                  <a:tcPr>
+                      <a:r>
+                        <a:rPr sz="1800" b="0">
+                          <a:solidFill>
+                            <a:srgbClr val="000000"/>
+                          </a:solidFill>
+                        </a:rPr>
+                        <a:t>4.3%</a:t>
+                      </a:r>
+                    </a:p>
+                  </a:txBody>
+                  <a:tcPr marL="50800" marR="50800" marT="25400" marB="25400" anchor="ctr">
                     <a:solidFill>
                       <a:srgbClr val="FFFFFF"/>
                     </a:solidFill>
@@ -4483,10 +4599,17 @@
                     <a:lstStyle/>
                     <a:p>
                       <a:pPr algn="ctr"/>
-                      <a:endParaRPr sz="1400"/>
-                    </a:p>
-                  </a:txBody>
-                  <a:tcPr>
+                      <a:r>
+                        <a:rPr sz="1800" b="0" dirty="0">
+                          <a:solidFill>
+                            <a:srgbClr val="000000"/>
+                          </a:solidFill>
+                        </a:rPr>
+                        <a:t>SLANT WEAK</a:t>
+                      </a:r>
+                    </a:p>
+                  </a:txBody>
+                  <a:tcPr marL="50800" marR="50800" marT="25400" marB="25400" anchor="ctr">
                     <a:solidFill>
                       <a:srgbClr val="FFFFFF"/>
                     </a:solidFill>
@@ -4498,10 +4621,17 @@
                     <a:lstStyle/>
                     <a:p>
                       <a:pPr algn="ctr"/>
-                      <a:endParaRPr sz="1400" dirty="0"/>
-                    </a:p>
-                  </a:txBody>
-                  <a:tcPr>
+                      <a:r>
+                        <a:rPr sz="1800" b="0" dirty="0">
+                          <a:solidFill>
+                            <a:srgbClr val="000000"/>
+                          </a:solidFill>
+                        </a:rPr>
+                        <a:t>28.6%</a:t>
+                      </a:r>
+                    </a:p>
+                  </a:txBody>
+                  <a:tcPr marL="50800" marR="50800" marT="25400" marB="25400" anchor="ctr">
                     <a:solidFill>
                       <a:srgbClr val="FFFFFF"/>
                     </a:solidFill>
@@ -4520,10 +4650,17 @@
                     <a:lstStyle/>
                     <a:p>
                       <a:pPr algn="ctr"/>
-                      <a:endParaRPr sz="1400"/>
-                    </a:p>
-                  </a:txBody>
-                  <a:tcPr>
+                      <a:r>
+                        <a:rPr sz="1800" b="0">
+                          <a:solidFill>
+                            <a:srgbClr val="000000"/>
+                          </a:solidFill>
+                        </a:rPr>
+                        <a:t>RAW X</a:t>
+                      </a:r>
+                    </a:p>
+                  </a:txBody>
+                  <a:tcPr marL="50800" marR="50800" marT="25400" marB="25400" anchor="ctr">
                     <a:solidFill>
                       <a:srgbClr val="F2F2F2"/>
                     </a:solidFill>
@@ -4535,10 +4672,17 @@
                     <a:lstStyle/>
                     <a:p>
                       <a:pPr algn="ctr"/>
-                      <a:endParaRPr sz="1400"/>
-                    </a:p>
-                  </a:txBody>
-                  <a:tcPr>
+                      <a:r>
+                        <a:rPr sz="1800" b="0">
+                          <a:solidFill>
+                            <a:srgbClr val="000000"/>
+                          </a:solidFill>
+                        </a:rPr>
+                        <a:t>7</a:t>
+                      </a:r>
+                    </a:p>
+                  </a:txBody>
+                  <a:tcPr marL="50800" marR="50800" marT="25400" marB="25400" anchor="ctr">
                     <a:solidFill>
                       <a:srgbClr val="F2F2F2"/>
                     </a:solidFill>
@@ -4550,10 +4694,17 @@
                     <a:lstStyle/>
                     <a:p>
                       <a:pPr algn="ctr"/>
-                      <a:endParaRPr sz="1400"/>
-                    </a:p>
-                  </a:txBody>
-                  <a:tcPr>
+                      <a:r>
+                        <a:rPr sz="1800" b="0">
+                          <a:solidFill>
+                            <a:srgbClr val="000000"/>
+                          </a:solidFill>
+                        </a:rPr>
+                        <a:t>4.3%</a:t>
+                      </a:r>
+                    </a:p>
+                  </a:txBody>
+                  <a:tcPr marL="50800" marR="50800" marT="25400" marB="25400" anchor="ctr">
                     <a:solidFill>
                       <a:srgbClr val="F2F2F2"/>
                     </a:solidFill>
@@ -4565,10 +4716,17 @@
                     <a:lstStyle/>
                     <a:p>
                       <a:pPr algn="ctr"/>
-                      <a:endParaRPr sz="1400"/>
-                    </a:p>
-                  </a:txBody>
-                  <a:tcPr>
+                      <a:r>
+                        <a:rPr sz="1800" b="0">
+                          <a:solidFill>
+                            <a:srgbClr val="000000"/>
+                          </a:solidFill>
+                        </a:rPr>
+                        <a:t>SLANT STRONG</a:t>
+                      </a:r>
+                    </a:p>
+                  </a:txBody>
+                  <a:tcPr marL="50800" marR="50800" marT="25400" marB="25400" anchor="ctr">
                     <a:solidFill>
                       <a:srgbClr val="F2F2F2"/>
                     </a:solidFill>
@@ -4580,10 +4738,17 @@
                     <a:lstStyle/>
                     <a:p>
                       <a:pPr algn="ctr"/>
-                      <a:endParaRPr sz="1400" dirty="0"/>
-                    </a:p>
-                  </a:txBody>
-                  <a:tcPr>
+                      <a:r>
+                        <a:rPr sz="1800" b="1" dirty="0">
+                          <a:solidFill>
+                            <a:srgbClr val="BE0000"/>
+                          </a:solidFill>
+                        </a:rPr>
+                        <a:t>100.0%</a:t>
+                      </a:r>
+                    </a:p>
+                  </a:txBody>
+                  <a:tcPr marL="50800" marR="50800" marT="25400" marB="25400" anchor="ctr">
                     <a:solidFill>
                       <a:srgbClr val="F2F2F2"/>
                     </a:solidFill>
@@ -4601,69 +4766,6 @@
       </p:graphicFrame>
       <p:sp>
         <p:nvSpPr>
-          <p:cNvPr id="8" name="TextBox 7"/>
-          <p:cNvSpPr txBox="1"/>
-          <p:nvPr/>
-        </p:nvSpPr>
-        <p:spPr>
-          <a:xfrm>
-            <a:off x="5969000" y="889000"/>
-            <a:ext cx="2921000" cy="3175000"/>
-          </a:xfrm>
-          <a:prstGeom prst="rect">
-            <a:avLst/>
-          </a:prstGeom>
-          <a:noFill/>
-        </p:spPr>
-        <p:txBody>
-          <a:bodyPr wrap="none">
-            <a:spAutoFit/>
-          </a:bodyPr>
-          <a:lstStyle/>
-          <a:p>
-            <a:pPr>
-              <a:defRPr sz="1600" b="1"/>
-            </a:pPr>
-            <a:r>
-              <a:t>Key Takeaways</a:t>
-            </a:r>
-          </a:p>
-          <a:p>
-            <a:pPr lvl="1">
-              <a:defRPr sz="1200"/>
-            </a:pPr>
-            <a:r>
-              <a:t>🔥 Highlight tendencies ≥60%</a:t>
-            </a:r>
-          </a:p>
-          <a:p>
-            <a:pPr lvl="1">
-              <a:defRPr sz="1200"/>
-            </a:pPr>
-            <a:r>
-              <a:t>⚠️ Pressure alerts</a:t>
-            </a:r>
-          </a:p>
-          <a:p>
-            <a:pPr lvl="1">
-              <a:defRPr sz="1200"/>
-            </a:pPr>
-            <a:r>
-              <a:t>🛑 Red zone notes</a:t>
-            </a:r>
-          </a:p>
-          <a:p>
-            <a:pPr lvl="1">
-              <a:defRPr sz="1200"/>
-            </a:pPr>
-            <a:r>
-              <a:t>AI-generated summary</a:t>
-            </a:r>
-          </a:p>
-        </p:txBody>
-      </p:sp>
-      <p:sp>
-        <p:nvSpPr>
           <p:cNvPr id="10" name="TextBox 9">
             <a:extLst>
               <a:ext uri="{FF2B5EF4-FFF2-40B4-BE49-F238E27FC236}">
@@ -4691,11 +4793,14 @@
           <a:lstStyle/>
           <a:p>
             <a:pPr>
-              <a:defRPr sz="1100"/>
+              <a:defRPr sz="1100">
+                <a:solidFill>
+                  <a:srgbClr val="000000"/>
+                </a:solidFill>
+              </a:defRPr>
             </a:pPr>
             <a:r>
-              <a:rPr dirty="0"/>
-              <a:t>Opponent: ____________</a:t>
+              <a:t>Opponent: River Falls    Date: 07/30/2026</a:t>
             </a:r>
           </a:p>
         </p:txBody>
@@ -4875,11 +4980,14 @@
           <a:lstStyle/>
           <a:p>
             <a:pPr>
-              <a:defRPr sz="1100"/>
+              <a:defRPr sz="1100">
+                <a:solidFill>
+                  <a:srgbClr val="000000"/>
+                </a:solidFill>
+              </a:defRPr>
             </a:pPr>
             <a:r>
-              <a:rPr dirty="0"/>
-              <a:t>Opponent: ____________</a:t>
+              <a:t>Opponent: River Falls    Date: 07/30/2026</a:t>
             </a:r>
           </a:p>
         </p:txBody>
@@ -4893,14 +5001,14 @@
           <p:nvPr>
             <p:extLst>
               <p:ext uri="{D42A27DB-BD31-4B8C-83A1-F6EECF244321}">
-                <p14:modId xmlns:p14="http://schemas.microsoft.com/office/powerpoint/2010/main" val="2377076607"/>
+                <p14:modId xmlns:p14="http://schemas.microsoft.com/office/powerpoint/2010/main" val="2602655622"/>
               </p:ext>
             </p:extLst>
           </p:nvPr>
         </p:nvGraphicFramePr>
         <p:xfrm>
           <a:off x="143123" y="889000"/>
-          <a:ext cx="5825873" cy="2920154"/>
+          <a:ext cx="8658972" cy="3001434"/>
         </p:xfrm>
         <a:graphic>
           <a:graphicData uri="http://schemas.openxmlformats.org/drawingml/2006/table">
@@ -4909,42 +5017,42 @@
                 <a:tableStyleId>{5C22544A-7EE6-4342-B048-85BDC9FD1C3A}</a:tableStyleId>
               </a:tblPr>
               <a:tblGrid>
-                <a:gridCol w="1073427">
+                <a:gridCol w="1595430">
                   <a:extLst>
                     <a:ext uri="{9D8B030D-6E8A-4147-A177-3AD203B41FA5}">
                       <a16:colId xmlns:a16="http://schemas.microsoft.com/office/drawing/2014/main" val="20000"/>
                     </a:ext>
                   </a:extLst>
                 </a:gridCol>
-                <a:gridCol w="868529">
+                <a:gridCol w="1290891">
                   <a:extLst>
                     <a:ext uri="{9D8B030D-6E8A-4147-A177-3AD203B41FA5}">
                       <a16:colId xmlns:a16="http://schemas.microsoft.com/office/drawing/2014/main" val="20001"/>
                     </a:ext>
                   </a:extLst>
                 </a:gridCol>
-                <a:gridCol w="970978">
+                <a:gridCol w="1443161">
                   <a:extLst>
                     <a:ext uri="{9D8B030D-6E8A-4147-A177-3AD203B41FA5}">
                       <a16:colId xmlns:a16="http://schemas.microsoft.com/office/drawing/2014/main" val="20002"/>
                     </a:ext>
                   </a:extLst>
                 </a:gridCol>
-                <a:gridCol w="970978">
+                <a:gridCol w="1443161">
                   <a:extLst>
                     <a:ext uri="{9D8B030D-6E8A-4147-A177-3AD203B41FA5}">
                       <a16:colId xmlns:a16="http://schemas.microsoft.com/office/drawing/2014/main" val="20003"/>
                     </a:ext>
                   </a:extLst>
                 </a:gridCol>
-                <a:gridCol w="970978">
+                <a:gridCol w="1443161">
                   <a:extLst>
                     <a:ext uri="{9D8B030D-6E8A-4147-A177-3AD203B41FA5}">
                       <a16:colId xmlns:a16="http://schemas.microsoft.com/office/drawing/2014/main" val="20004"/>
                     </a:ext>
                   </a:extLst>
                 </a:gridCol>
-                <a:gridCol w="970983">
+                <a:gridCol w="1443168">
                   <a:extLst>
                     <a:ext uri="{9D8B030D-6E8A-4147-A177-3AD203B41FA5}">
                       <a16:colId xmlns:a16="http://schemas.microsoft.com/office/drawing/2014/main" val="20005"/>
@@ -4960,7 +5068,7 @@
                     <a:p>
                       <a:pPr algn="ctr"/>
                       <a:r>
-                        <a:rPr sz="1200" dirty="0">
+                        <a:rPr sz="2000" b="1">
                           <a:solidFill>
                             <a:srgbClr val="FFFFFF"/>
                           </a:solidFill>
@@ -4969,7 +5077,7 @@
                       </a:r>
                     </a:p>
                   </a:txBody>
-                  <a:tcPr>
+                  <a:tcPr marL="50800" marR="50800" marT="25400" marB="25400" anchor="ctr">
                     <a:solidFill>
                       <a:srgbClr val="BE0000"/>
                     </a:solidFill>
@@ -4982,7 +5090,7 @@
                     <a:p>
                       <a:pPr algn="ctr"/>
                       <a:r>
-                        <a:rPr sz="1200" dirty="0">
+                        <a:rPr sz="2000" b="1">
                           <a:solidFill>
                             <a:srgbClr val="FFFFFF"/>
                           </a:solidFill>
@@ -4991,7 +5099,7 @@
                       </a:r>
                     </a:p>
                   </a:txBody>
-                  <a:tcPr>
+                  <a:tcPr marL="50800" marR="50800" marT="25400" marB="25400" anchor="ctr">
                     <a:solidFill>
                       <a:srgbClr val="BE0000"/>
                     </a:solidFill>
@@ -5004,7 +5112,7 @@
                     <a:p>
                       <a:pPr algn="ctr"/>
                       <a:r>
-                        <a:rPr sz="1200" dirty="0">
+                        <a:rPr sz="2000" b="1">
                           <a:solidFill>
                             <a:srgbClr val="FFFFFF"/>
                           </a:solidFill>
@@ -5013,7 +5121,7 @@
                       </a:r>
                     </a:p>
                   </a:txBody>
-                  <a:tcPr>
+                  <a:tcPr marL="50800" marR="50800" marT="25400" marB="25400" anchor="ctr">
                     <a:solidFill>
                       <a:srgbClr val="BE0000"/>
                     </a:solidFill>
@@ -5026,7 +5134,7 @@
                     <a:p>
                       <a:pPr algn="ctr"/>
                       <a:r>
-                        <a:rPr sz="1200" dirty="0">
+                        <a:rPr sz="2000" b="1">
                           <a:solidFill>
                             <a:srgbClr val="FFFFFF"/>
                           </a:solidFill>
@@ -5035,7 +5143,7 @@
                       </a:r>
                     </a:p>
                   </a:txBody>
-                  <a:tcPr>
+                  <a:tcPr marL="50800" marR="50800" marT="25400" marB="25400" anchor="ctr">
                     <a:solidFill>
                       <a:srgbClr val="BE0000"/>
                     </a:solidFill>
@@ -5048,7 +5156,7 @@
                     <a:p>
                       <a:pPr algn="ctr"/>
                       <a:r>
-                        <a:rPr sz="1200" dirty="0">
+                        <a:rPr sz="2000" b="1">
                           <a:solidFill>
                             <a:srgbClr val="FFFFFF"/>
                           </a:solidFill>
@@ -5057,7 +5165,7 @@
                       </a:r>
                     </a:p>
                   </a:txBody>
-                  <a:tcPr>
+                  <a:tcPr marL="50800" marR="50800" marT="25400" marB="25400" anchor="ctr">
                     <a:solidFill>
                       <a:srgbClr val="BE0000"/>
                     </a:solidFill>
@@ -5070,7 +5178,7 @@
                     <a:p>
                       <a:pPr algn="ctr"/>
                       <a:r>
-                        <a:rPr sz="1200" dirty="0">
+                        <a:rPr sz="2000" b="1">
                           <a:solidFill>
                             <a:srgbClr val="FFFFFF"/>
                           </a:solidFill>
@@ -5079,7 +5187,7 @@
                       </a:r>
                     </a:p>
                   </a:txBody>
-                  <a:tcPr>
+                  <a:tcPr marL="50800" marR="50800" marT="25400" marB="25400" anchor="ctr">
                     <a:solidFill>
                       <a:srgbClr val="BE0000"/>
                     </a:solidFill>
@@ -5099,12 +5207,16 @@
                     <a:p>
                       <a:pPr algn="ctr"/>
                       <a:r>
-                        <a:rPr sz="1200" dirty="0"/>
-                        <a:t>Coverage by Down</a:t>
-                      </a:r>
-                    </a:p>
-                  </a:txBody>
-                  <a:tcPr>
+                        <a:rPr sz="1800" b="0">
+                          <a:solidFill>
+                            <a:srgbClr val="000000"/>
+                          </a:solidFill>
+                        </a:rPr>
+                        <a:t>COVER 2</a:t>
+                      </a:r>
+                    </a:p>
+                  </a:txBody>
+                  <a:tcPr marL="50800" marR="50800" marT="25400" marB="25400" anchor="ctr">
                     <a:solidFill>
                       <a:srgbClr val="F2F2F2"/>
                     </a:solidFill>
@@ -5116,10 +5228,17 @@
                     <a:lstStyle/>
                     <a:p>
                       <a:pPr algn="ctr"/>
-                      <a:endParaRPr sz="1200" dirty="0"/>
-                    </a:p>
-                  </a:txBody>
-                  <a:tcPr>
+                      <a:r>
+                        <a:rPr sz="1800" b="0">
+                          <a:solidFill>
+                            <a:srgbClr val="000000"/>
+                          </a:solidFill>
+                        </a:rPr>
+                        <a:t>42.1%</a:t>
+                      </a:r>
+                    </a:p>
+                  </a:txBody>
+                  <a:tcPr marL="50800" marR="50800" marT="25400" marB="25400" anchor="ctr">
                     <a:solidFill>
                       <a:srgbClr val="F2F2F2"/>
                     </a:solidFill>
@@ -5131,10 +5250,17 @@
                     <a:lstStyle/>
                     <a:p>
                       <a:pPr algn="ctr"/>
-                      <a:endParaRPr sz="1200"/>
-                    </a:p>
-                  </a:txBody>
-                  <a:tcPr>
+                      <a:r>
+                        <a:rPr sz="1800" b="0">
+                          <a:solidFill>
+                            <a:srgbClr val="000000"/>
+                          </a:solidFill>
+                        </a:rPr>
+                        <a:t>52.3%</a:t>
+                      </a:r>
+                    </a:p>
+                  </a:txBody>
+                  <a:tcPr marL="50800" marR="50800" marT="25400" marB="25400" anchor="ctr">
                     <a:solidFill>
                       <a:srgbClr val="F2F2F2"/>
                     </a:solidFill>
@@ -5146,10 +5272,17 @@
                     <a:lstStyle/>
                     <a:p>
                       <a:pPr algn="ctr"/>
-                      <a:endParaRPr sz="1200"/>
-                    </a:p>
-                  </a:txBody>
-                  <a:tcPr>
+                      <a:r>
+                        <a:rPr sz="1800" b="0">
+                          <a:solidFill>
+                            <a:srgbClr val="000000"/>
+                          </a:solidFill>
+                        </a:rPr>
+                        <a:t>34.5%</a:t>
+                      </a:r>
+                    </a:p>
+                  </a:txBody>
+                  <a:tcPr marL="50800" marR="50800" marT="25400" marB="25400" anchor="ctr">
                     <a:solidFill>
                       <a:srgbClr val="F2F2F2"/>
                     </a:solidFill>
@@ -5161,10 +5294,17 @@
                     <a:lstStyle/>
                     <a:p>
                       <a:pPr algn="ctr"/>
-                      <a:endParaRPr sz="1200"/>
-                    </a:p>
-                  </a:txBody>
-                  <a:tcPr>
+                      <a:r>
+                        <a:rPr sz="1800" b="0">
+                          <a:solidFill>
+                            <a:srgbClr val="000000"/>
+                          </a:solidFill>
+                        </a:rPr>
+                        <a:t>43.2%</a:t>
+                      </a:r>
+                    </a:p>
+                  </a:txBody>
+                  <a:tcPr marL="50800" marR="50800" marT="25400" marB="25400" anchor="ctr">
                     <a:solidFill>
                       <a:srgbClr val="F2F2F2"/>
                     </a:solidFill>
@@ -5176,10 +5316,17 @@
                     <a:lstStyle/>
                     <a:p>
                       <a:pPr algn="ctr"/>
-                      <a:endParaRPr sz="1200"/>
-                    </a:p>
-                  </a:txBody>
-                  <a:tcPr>
+                      <a:r>
+                        <a:rPr sz="1800" b="0">
+                          <a:solidFill>
+                            <a:srgbClr val="000000"/>
+                          </a:solidFill>
+                        </a:rPr>
+                        <a:t>0.0%</a:t>
+                      </a:r>
+                    </a:p>
+                  </a:txBody>
+                  <a:tcPr marL="50800" marR="50800" marT="25400" marB="25400" anchor="ctr">
                     <a:solidFill>
                       <a:srgbClr val="F2F2F2"/>
                     </a:solidFill>
@@ -5198,10 +5345,17 @@
                     <a:lstStyle/>
                     <a:p>
                       <a:pPr algn="ctr"/>
-                      <a:endParaRPr sz="1200"/>
-                    </a:p>
-                  </a:txBody>
-                  <a:tcPr>
+                      <a:r>
+                        <a:rPr sz="1800" b="0">
+                          <a:solidFill>
+                            <a:srgbClr val="000000"/>
+                          </a:solidFill>
+                        </a:rPr>
+                        <a:t>COVER 0</a:t>
+                      </a:r>
+                    </a:p>
+                  </a:txBody>
+                  <a:tcPr marL="50800" marR="50800" marT="25400" marB="25400" anchor="ctr">
                     <a:solidFill>
                       <a:srgbClr val="FFFFFF"/>
                     </a:solidFill>
@@ -5213,10 +5367,17 @@
                     <a:lstStyle/>
                     <a:p>
                       <a:pPr algn="ctr"/>
-                      <a:endParaRPr sz="1200"/>
-                    </a:p>
-                  </a:txBody>
-                  <a:tcPr>
+                      <a:r>
+                        <a:rPr sz="1800" b="0">
+                          <a:solidFill>
+                            <a:srgbClr val="000000"/>
+                          </a:solidFill>
+                        </a:rPr>
+                        <a:t>41.5%</a:t>
+                      </a:r>
+                    </a:p>
+                  </a:txBody>
+                  <a:tcPr marL="50800" marR="50800" marT="25400" marB="25400" anchor="ctr">
                     <a:solidFill>
                       <a:srgbClr val="FFFFFF"/>
                     </a:solidFill>
@@ -5228,10 +5389,17 @@
                     <a:lstStyle/>
                     <a:p>
                       <a:pPr algn="ctr"/>
-                      <a:endParaRPr sz="1200" dirty="0"/>
-                    </a:p>
-                  </a:txBody>
-                  <a:tcPr>
+                      <a:r>
+                        <a:rPr sz="1800" b="0">
+                          <a:solidFill>
+                            <a:srgbClr val="000000"/>
+                          </a:solidFill>
+                        </a:rPr>
+                        <a:t>33.8%</a:t>
+                      </a:r>
+                    </a:p>
+                  </a:txBody>
+                  <a:tcPr marL="50800" marR="50800" marT="25400" marB="25400" anchor="ctr">
                     <a:solidFill>
                       <a:srgbClr val="FFFFFF"/>
                     </a:solidFill>
@@ -5243,10 +5411,17 @@
                     <a:lstStyle/>
                     <a:p>
                       <a:pPr algn="ctr"/>
-                      <a:endParaRPr sz="1200" dirty="0"/>
-                    </a:p>
-                  </a:txBody>
-                  <a:tcPr>
+                      <a:r>
+                        <a:rPr sz="1800" b="0">
+                          <a:solidFill>
+                            <a:srgbClr val="000000"/>
+                          </a:solidFill>
+                        </a:rPr>
+                        <a:t>47.3%</a:t>
+                      </a:r>
+                    </a:p>
+                  </a:txBody>
+                  <a:tcPr marL="50800" marR="50800" marT="25400" marB="25400" anchor="ctr">
                     <a:solidFill>
                       <a:srgbClr val="FFFFFF"/>
                     </a:solidFill>
@@ -5258,10 +5433,17 @@
                     <a:lstStyle/>
                     <a:p>
                       <a:pPr algn="ctr"/>
-                      <a:endParaRPr sz="1200"/>
-                    </a:p>
-                  </a:txBody>
-                  <a:tcPr>
+                      <a:r>
+                        <a:rPr sz="1800" b="0">
+                          <a:solidFill>
+                            <a:srgbClr val="000000"/>
+                          </a:solidFill>
+                        </a:rPr>
+                        <a:t>40.5%</a:t>
+                      </a:r>
+                    </a:p>
+                  </a:txBody>
+                  <a:tcPr marL="50800" marR="50800" marT="25400" marB="25400" anchor="ctr">
                     <a:solidFill>
                       <a:srgbClr val="FFFFFF"/>
                     </a:solidFill>
@@ -5273,10 +5455,17 @@
                     <a:lstStyle/>
                     <a:p>
                       <a:pPr algn="ctr"/>
-                      <a:endParaRPr sz="1200"/>
-                    </a:p>
-                  </a:txBody>
-                  <a:tcPr>
+                      <a:r>
+                        <a:rPr sz="1800" b="1">
+                          <a:solidFill>
+                            <a:srgbClr val="BE0000"/>
+                          </a:solidFill>
+                        </a:rPr>
+                        <a:t>71.4%</a:t>
+                      </a:r>
+                    </a:p>
+                  </a:txBody>
+                  <a:tcPr marL="50800" marR="50800" marT="25400" marB="25400" anchor="ctr">
                     <a:solidFill>
                       <a:srgbClr val="FFFFFF"/>
                     </a:solidFill>
@@ -5295,10 +5484,17 @@
                     <a:lstStyle/>
                     <a:p>
                       <a:pPr algn="ctr"/>
-                      <a:endParaRPr sz="1200"/>
-                    </a:p>
-                  </a:txBody>
-                  <a:tcPr>
+                      <a:r>
+                        <a:rPr sz="1800" b="0">
+                          <a:solidFill>
+                            <a:srgbClr val="000000"/>
+                          </a:solidFill>
+                        </a:rPr>
+                        <a:t>COVER 4</a:t>
+                      </a:r>
+                    </a:p>
+                  </a:txBody>
+                  <a:tcPr marL="50800" marR="50800" marT="25400" marB="25400" anchor="ctr">
                     <a:solidFill>
                       <a:srgbClr val="F2F2F2"/>
                     </a:solidFill>
@@ -5310,10 +5506,17 @@
                     <a:lstStyle/>
                     <a:p>
                       <a:pPr algn="ctr"/>
-                      <a:endParaRPr sz="1200"/>
-                    </a:p>
-                  </a:txBody>
-                  <a:tcPr>
+                      <a:r>
+                        <a:rPr sz="1800" b="0">
+                          <a:solidFill>
+                            <a:srgbClr val="000000"/>
+                          </a:solidFill>
+                        </a:rPr>
+                        <a:t>5.5%</a:t>
+                      </a:r>
+                    </a:p>
+                  </a:txBody>
+                  <a:tcPr marL="50800" marR="50800" marT="25400" marB="25400" anchor="ctr">
                     <a:solidFill>
                       <a:srgbClr val="F2F2F2"/>
                     </a:solidFill>
@@ -5325,10 +5528,17 @@
                     <a:lstStyle/>
                     <a:p>
                       <a:pPr algn="ctr"/>
-                      <a:endParaRPr sz="1200"/>
-                    </a:p>
-                  </a:txBody>
-                  <a:tcPr>
+                      <a:r>
+                        <a:rPr sz="1800" b="0">
+                          <a:solidFill>
+                            <a:srgbClr val="000000"/>
+                          </a:solidFill>
+                        </a:rPr>
+                        <a:t>3.1%</a:t>
+                      </a:r>
+                    </a:p>
+                  </a:txBody>
+                  <a:tcPr marL="50800" marR="50800" marT="25400" marB="25400" anchor="ctr">
                     <a:solidFill>
                       <a:srgbClr val="F2F2F2"/>
                     </a:solidFill>
@@ -5340,10 +5550,17 @@
                     <a:lstStyle/>
                     <a:p>
                       <a:pPr algn="ctr"/>
-                      <a:endParaRPr sz="1200"/>
-                    </a:p>
-                  </a:txBody>
-                  <a:tcPr>
+                      <a:r>
+                        <a:rPr sz="1800" b="0">
+                          <a:solidFill>
+                            <a:srgbClr val="000000"/>
+                          </a:solidFill>
+                        </a:rPr>
+                        <a:t>7.3%</a:t>
+                      </a:r>
+                    </a:p>
+                  </a:txBody>
+                  <a:tcPr marL="50800" marR="50800" marT="25400" marB="25400" anchor="ctr">
                     <a:solidFill>
                       <a:srgbClr val="F2F2F2"/>
                     </a:solidFill>
@@ -5355,10 +5572,17 @@
                     <a:lstStyle/>
                     <a:p>
                       <a:pPr algn="ctr"/>
-                      <a:endParaRPr sz="1200" dirty="0"/>
-                    </a:p>
-                  </a:txBody>
-                  <a:tcPr>
+                      <a:r>
+                        <a:rPr sz="1800" b="0">
+                          <a:solidFill>
+                            <a:srgbClr val="000000"/>
+                          </a:solidFill>
+                        </a:rPr>
+                        <a:t>8.1%</a:t>
+                      </a:r>
+                    </a:p>
+                  </a:txBody>
+                  <a:tcPr marL="50800" marR="50800" marT="25400" marB="25400" anchor="ctr">
                     <a:solidFill>
                       <a:srgbClr val="F2F2F2"/>
                     </a:solidFill>
@@ -5370,10 +5594,17 @@
                     <a:lstStyle/>
                     <a:p>
                       <a:pPr algn="ctr"/>
-                      <a:endParaRPr sz="1200" dirty="0"/>
-                    </a:p>
-                  </a:txBody>
-                  <a:tcPr>
+                      <a:r>
+                        <a:rPr sz="1800" b="0">
+                          <a:solidFill>
+                            <a:srgbClr val="000000"/>
+                          </a:solidFill>
+                        </a:rPr>
+                        <a:t>0.0%</a:t>
+                      </a:r>
+                    </a:p>
+                  </a:txBody>
+                  <a:tcPr marL="50800" marR="50800" marT="25400" marB="25400" anchor="ctr">
                     <a:solidFill>
                       <a:srgbClr val="F2F2F2"/>
                     </a:solidFill>
@@ -5392,10 +5623,17 @@
                     <a:lstStyle/>
                     <a:p>
                       <a:pPr algn="ctr"/>
-                      <a:endParaRPr sz="1200"/>
-                    </a:p>
-                  </a:txBody>
-                  <a:tcPr>
+                      <a:r>
+                        <a:rPr sz="1800" b="0">
+                          <a:solidFill>
+                            <a:srgbClr val="000000"/>
+                          </a:solidFill>
+                        </a:rPr>
+                        <a:t>COVER 3</a:t>
+                      </a:r>
+                    </a:p>
+                  </a:txBody>
+                  <a:tcPr marL="50800" marR="50800" marT="25400" marB="25400" anchor="ctr">
                     <a:solidFill>
                       <a:srgbClr val="FFFFFF"/>
                     </a:solidFill>
@@ -5407,10 +5645,17 @@
                     <a:lstStyle/>
                     <a:p>
                       <a:pPr algn="ctr"/>
-                      <a:endParaRPr sz="1200"/>
-                    </a:p>
-                  </a:txBody>
-                  <a:tcPr>
+                      <a:r>
+                        <a:rPr sz="1800" b="0">
+                          <a:solidFill>
+                            <a:srgbClr val="000000"/>
+                          </a:solidFill>
+                        </a:rPr>
+                        <a:t>1.8%</a:t>
+                      </a:r>
+                    </a:p>
+                  </a:txBody>
+                  <a:tcPr marL="50800" marR="50800" marT="25400" marB="25400" anchor="ctr">
                     <a:solidFill>
                       <a:srgbClr val="FFFFFF"/>
                     </a:solidFill>
@@ -5422,10 +5667,17 @@
                     <a:lstStyle/>
                     <a:p>
                       <a:pPr algn="ctr"/>
-                      <a:endParaRPr sz="1200"/>
-                    </a:p>
-                  </a:txBody>
-                  <a:tcPr>
+                      <a:r>
+                        <a:rPr sz="1800" b="0">
+                          <a:solidFill>
+                            <a:srgbClr val="000000"/>
+                          </a:solidFill>
+                        </a:rPr>
+                        <a:t>0.0%</a:t>
+                      </a:r>
+                    </a:p>
+                  </a:txBody>
+                  <a:tcPr marL="50800" marR="50800" marT="25400" marB="25400" anchor="ctr">
                     <a:solidFill>
                       <a:srgbClr val="FFFFFF"/>
                     </a:solidFill>
@@ -5437,10 +5689,17 @@
                     <a:lstStyle/>
                     <a:p>
                       <a:pPr algn="ctr"/>
-                      <a:endParaRPr sz="1200"/>
-                    </a:p>
-                  </a:txBody>
-                  <a:tcPr>
+                      <a:r>
+                        <a:rPr sz="1800" b="0">
+                          <a:solidFill>
+                            <a:srgbClr val="000000"/>
+                          </a:solidFill>
+                        </a:rPr>
+                        <a:t>5.5%</a:t>
+                      </a:r>
+                    </a:p>
+                  </a:txBody>
+                  <a:tcPr marL="50800" marR="50800" marT="25400" marB="25400" anchor="ctr">
                     <a:solidFill>
                       <a:srgbClr val="FFFFFF"/>
                     </a:solidFill>
@@ -5452,10 +5711,17 @@
                     <a:lstStyle/>
                     <a:p>
                       <a:pPr algn="ctr"/>
-                      <a:endParaRPr sz="1200"/>
-                    </a:p>
-                  </a:txBody>
-                  <a:tcPr>
+                      <a:r>
+                        <a:rPr sz="1800" b="0">
+                          <a:solidFill>
+                            <a:srgbClr val="000000"/>
+                          </a:solidFill>
+                        </a:rPr>
+                        <a:t>0.0%</a:t>
+                      </a:r>
+                    </a:p>
+                  </a:txBody>
+                  <a:tcPr marL="50800" marR="50800" marT="25400" marB="25400" anchor="ctr">
                     <a:solidFill>
                       <a:srgbClr val="FFFFFF"/>
                     </a:solidFill>
@@ -5467,10 +5733,17 @@
                     <a:lstStyle/>
                     <a:p>
                       <a:pPr algn="ctr"/>
-                      <a:endParaRPr sz="1200" dirty="0"/>
-                    </a:p>
-                  </a:txBody>
-                  <a:tcPr>
+                      <a:r>
+                        <a:rPr sz="1800" b="0">
+                          <a:solidFill>
+                            <a:srgbClr val="000000"/>
+                          </a:solidFill>
+                        </a:rPr>
+                        <a:t>0.0%</a:t>
+                      </a:r>
+                    </a:p>
+                  </a:txBody>
+                  <a:tcPr marL="50800" marR="50800" marT="25400" marB="25400" anchor="ctr">
                     <a:solidFill>
                       <a:srgbClr val="FFFFFF"/>
                     </a:solidFill>
@@ -5489,10 +5762,17 @@
                     <a:lstStyle/>
                     <a:p>
                       <a:pPr algn="ctr"/>
-                      <a:endParaRPr sz="1200"/>
-                    </a:p>
-                  </a:txBody>
-                  <a:tcPr>
+                      <a:r>
+                        <a:rPr sz="1800" b="0">
+                          <a:solidFill>
+                            <a:srgbClr val="000000"/>
+                          </a:solidFill>
+                        </a:rPr>
+                        <a:t>COVER 1</a:t>
+                      </a:r>
+                    </a:p>
+                  </a:txBody>
+                  <a:tcPr marL="50800" marR="50800" marT="25400" marB="25400" anchor="ctr">
                     <a:solidFill>
                       <a:srgbClr val="F2F2F2"/>
                     </a:solidFill>
@@ -5504,10 +5784,17 @@
                     <a:lstStyle/>
                     <a:p>
                       <a:pPr algn="ctr"/>
-                      <a:endParaRPr sz="1200"/>
-                    </a:p>
-                  </a:txBody>
-                  <a:tcPr>
+                      <a:r>
+                        <a:rPr sz="1800" b="0">
+                          <a:solidFill>
+                            <a:srgbClr val="000000"/>
+                          </a:solidFill>
+                        </a:rPr>
+                        <a:t>0.6%</a:t>
+                      </a:r>
+                    </a:p>
+                  </a:txBody>
+                  <a:tcPr marL="50800" marR="50800" marT="25400" marB="25400" anchor="ctr">
                     <a:solidFill>
                       <a:srgbClr val="F2F2F2"/>
                     </a:solidFill>
@@ -5519,10 +5806,17 @@
                     <a:lstStyle/>
                     <a:p>
                       <a:pPr algn="ctr"/>
-                      <a:endParaRPr sz="1200"/>
-                    </a:p>
-                  </a:txBody>
-                  <a:tcPr>
+                      <a:r>
+                        <a:rPr sz="1800" b="0">
+                          <a:solidFill>
+                            <a:srgbClr val="000000"/>
+                          </a:solidFill>
+                        </a:rPr>
+                        <a:t>1.5%</a:t>
+                      </a:r>
+                    </a:p>
+                  </a:txBody>
+                  <a:tcPr marL="50800" marR="50800" marT="25400" marB="25400" anchor="ctr">
                     <a:solidFill>
                       <a:srgbClr val="F2F2F2"/>
                     </a:solidFill>
@@ -5534,10 +5828,17 @@
                     <a:lstStyle/>
                     <a:p>
                       <a:pPr algn="ctr"/>
-                      <a:endParaRPr sz="1200"/>
-                    </a:p>
-                  </a:txBody>
-                  <a:tcPr>
+                      <a:r>
+                        <a:rPr sz="1800" b="0">
+                          <a:solidFill>
+                            <a:srgbClr val="000000"/>
+                          </a:solidFill>
+                        </a:rPr>
+                        <a:t>0.0%</a:t>
+                      </a:r>
+                    </a:p>
+                  </a:txBody>
+                  <a:tcPr marL="50800" marR="50800" marT="25400" marB="25400" anchor="ctr">
                     <a:solidFill>
                       <a:srgbClr val="F2F2F2"/>
                     </a:solidFill>
@@ -5549,10 +5850,17 @@
                     <a:lstStyle/>
                     <a:p>
                       <a:pPr algn="ctr"/>
-                      <a:endParaRPr sz="1200"/>
-                    </a:p>
-                  </a:txBody>
-                  <a:tcPr>
+                      <a:r>
+                        <a:rPr sz="1800" b="0">
+                          <a:solidFill>
+                            <a:srgbClr val="000000"/>
+                          </a:solidFill>
+                        </a:rPr>
+                        <a:t>0.0%</a:t>
+                      </a:r>
+                    </a:p>
+                  </a:txBody>
+                  <a:tcPr marL="50800" marR="50800" marT="25400" marB="25400" anchor="ctr">
                     <a:solidFill>
                       <a:srgbClr val="F2F2F2"/>
                     </a:solidFill>
@@ -5564,10 +5872,17 @@
                     <a:lstStyle/>
                     <a:p>
                       <a:pPr algn="ctr"/>
-                      <a:endParaRPr sz="1200" dirty="0"/>
-                    </a:p>
-                  </a:txBody>
-                  <a:tcPr>
+                      <a:r>
+                        <a:rPr sz="1800" b="0" dirty="0">
+                          <a:solidFill>
+                            <a:srgbClr val="000000"/>
+                          </a:solidFill>
+                        </a:rPr>
+                        <a:t>0.0%</a:t>
+                      </a:r>
+                    </a:p>
+                  </a:txBody>
+                  <a:tcPr marL="50800" marR="50800" marT="25400" marB="25400" anchor="ctr">
                     <a:solidFill>
                       <a:srgbClr val="F2F2F2"/>
                     </a:solidFill>
@@ -5583,69 +5898,6 @@
           </a:graphicData>
         </a:graphic>
       </p:graphicFrame>
-      <p:sp>
-        <p:nvSpPr>
-          <p:cNvPr id="8" name="TextBox 7"/>
-          <p:cNvSpPr txBox="1"/>
-          <p:nvPr/>
-        </p:nvSpPr>
-        <p:spPr>
-          <a:xfrm>
-            <a:off x="5969000" y="889000"/>
-            <a:ext cx="2921000" cy="3175000"/>
-          </a:xfrm>
-          <a:prstGeom prst="rect">
-            <a:avLst/>
-          </a:prstGeom>
-          <a:noFill/>
-        </p:spPr>
-        <p:txBody>
-          <a:bodyPr wrap="none">
-            <a:spAutoFit/>
-          </a:bodyPr>
-          <a:lstStyle/>
-          <a:p>
-            <a:pPr>
-              <a:defRPr sz="1600" b="1"/>
-            </a:pPr>
-            <a:r>
-              <a:t>Key Takeaways</a:t>
-            </a:r>
-          </a:p>
-          <a:p>
-            <a:pPr lvl="1">
-              <a:defRPr sz="1200"/>
-            </a:pPr>
-            <a:r>
-              <a:t>🔥 Highlight tendencies ≥60%</a:t>
-            </a:r>
-          </a:p>
-          <a:p>
-            <a:pPr lvl="1">
-              <a:defRPr sz="1200"/>
-            </a:pPr>
-            <a:r>
-              <a:t>⚠️ Pressure alerts</a:t>
-            </a:r>
-          </a:p>
-          <a:p>
-            <a:pPr lvl="1">
-              <a:defRPr sz="1200"/>
-            </a:pPr>
-            <a:r>
-              <a:t>🛑 Red zone notes</a:t>
-            </a:r>
-          </a:p>
-          <a:p>
-            <a:pPr lvl="1">
-              <a:defRPr sz="1200"/>
-            </a:pPr>
-            <a:r>
-              <a:t>AI-generated summary</a:t>
-            </a:r>
-          </a:p>
-        </p:txBody>
-      </p:sp>
     </p:spTree>
   </p:cSld>
   <p:clrMapOvr>
@@ -5798,304 +6050,6 @@
           </a:p>
         </p:txBody>
       </p:sp>
-      <p:graphicFrame>
-        <p:nvGraphicFramePr>
-          <p:cNvPr id="7" name="Table 6"/>
-          <p:cNvGraphicFramePr>
-            <a:graphicFrameLocks noGrp="1"/>
-          </p:cNvGraphicFramePr>
-          <p:nvPr>
-            <p:extLst>
-              <p:ext uri="{D42A27DB-BD31-4B8C-83A1-F6EECF244321}">
-                <p14:modId xmlns:p14="http://schemas.microsoft.com/office/powerpoint/2010/main" val="3332014551"/>
-              </p:ext>
-            </p:extLst>
-          </p:nvPr>
-        </p:nvGraphicFramePr>
-        <p:xfrm>
-          <a:off x="254000" y="889000"/>
-          <a:ext cx="5715000" cy="1861818"/>
-        </p:xfrm>
-        <a:graphic>
-          <a:graphicData uri="http://schemas.openxmlformats.org/drawingml/2006/table">
-            <a:tbl>
-              <a:tblPr firstRow="1" bandRow="1">
-                <a:tableStyleId>{5C22544A-7EE6-4342-B048-85BDC9FD1C3A}</a:tableStyleId>
-              </a:tblPr>
-              <a:tblGrid>
-                <a:gridCol w="2857500">
-                  <a:extLst>
-                    <a:ext uri="{9D8B030D-6E8A-4147-A177-3AD203B41FA5}">
-                      <a16:colId xmlns:a16="http://schemas.microsoft.com/office/drawing/2014/main" val="20000"/>
-                    </a:ext>
-                  </a:extLst>
-                </a:gridCol>
-                <a:gridCol w="2857500">
-                  <a:extLst>
-                    <a:ext uri="{9D8B030D-6E8A-4147-A177-3AD203B41FA5}">
-                      <a16:colId xmlns:a16="http://schemas.microsoft.com/office/drawing/2014/main" val="20001"/>
-                    </a:ext>
-                  </a:extLst>
-                </a:gridCol>
-              </a:tblGrid>
-              <a:tr h="216231">
-                <a:tc>
-                  <a:txBody>
-                    <a:bodyPr/>
-                    <a:lstStyle/>
-                    <a:p>
-                      <a:r>
-                        <a:rPr sz="1200">
-                          <a:solidFill>
-                            <a:srgbClr val="FFFFFF"/>
-                          </a:solidFill>
-                        </a:rPr>
-                        <a:t>Situation</a:t>
-                      </a:r>
-                    </a:p>
-                  </a:txBody>
-                  <a:tcPr>
-                    <a:solidFill>
-                      <a:srgbClr val="BE0000"/>
-                    </a:solidFill>
-                  </a:tcPr>
-                </a:tc>
-                <a:tc>
-                  <a:txBody>
-                    <a:bodyPr/>
-                    <a:lstStyle/>
-                    <a:p>
-                      <a:r>
-                        <a:rPr sz="1200" dirty="0">
-                          <a:solidFill>
-                            <a:srgbClr val="FFFFFF"/>
-                          </a:solidFill>
-                        </a:rPr>
-                        <a:t>Top 5 Front/Stunt/Blitz/Coverage Calls</a:t>
-                      </a:r>
-                    </a:p>
-                  </a:txBody>
-                  <a:tcPr>
-                    <a:solidFill>
-                      <a:srgbClr val="BE0000"/>
-                    </a:solidFill>
-                  </a:tcPr>
-                </a:tc>
-                <a:extLst>
-                  <a:ext uri="{0D108BD9-81ED-4DB2-BD59-A6C34878D82A}">
-                    <a16:rowId xmlns:a16="http://schemas.microsoft.com/office/drawing/2014/main" val="10000"/>
-                  </a:ext>
-                </a:extLst>
-              </a:tr>
-              <a:tr h="529166">
-                <a:tc>
-                  <a:txBody>
-                    <a:bodyPr/>
-                    <a:lstStyle/>
-                    <a:p>
-                      <a:r>
-                        <a:rPr dirty="0"/>
-                        <a:t>3rd &amp; </a:t>
-                      </a:r>
-                      <a:r>
-                        <a:rPr lang="en-US" dirty="0"/>
-                        <a:t>7+</a:t>
-                      </a:r>
-                      <a:endParaRPr dirty="0"/>
-                    </a:p>
-                  </a:txBody>
-                  <a:tcPr>
-                    <a:solidFill>
-                      <a:srgbClr val="F2F2F2"/>
-                    </a:solidFill>
-                  </a:tcPr>
-                </a:tc>
-                <a:tc>
-                  <a:txBody>
-                    <a:bodyPr/>
-                    <a:lstStyle/>
-                    <a:p>
-                      <a:endParaRPr/>
-                    </a:p>
-                  </a:txBody>
-                  <a:tcPr>
-                    <a:solidFill>
-                      <a:srgbClr val="F2F2F2"/>
-                    </a:solidFill>
-                  </a:tcPr>
-                </a:tc>
-                <a:extLst>
-                  <a:ext uri="{0D108BD9-81ED-4DB2-BD59-A6C34878D82A}">
-                    <a16:rowId xmlns:a16="http://schemas.microsoft.com/office/drawing/2014/main" val="10001"/>
-                  </a:ext>
-                </a:extLst>
-              </a:tr>
-              <a:tr h="529166">
-                <a:tc>
-                  <a:txBody>
-                    <a:bodyPr/>
-                    <a:lstStyle/>
-                    <a:p>
-                      <a:r>
-                        <a:rPr lang="en-US" dirty="0"/>
-                        <a:t>3</a:t>
-                      </a:r>
-                      <a:r>
-                        <a:rPr lang="en-US" baseline="30000" dirty="0"/>
-                        <a:t>rd</a:t>
-                      </a:r>
-                      <a:r>
-                        <a:rPr lang="en-US" dirty="0"/>
-                        <a:t> &amp; 3-6</a:t>
-                      </a:r>
-                      <a:endParaRPr dirty="0"/>
-                    </a:p>
-                  </a:txBody>
-                  <a:tcPr>
-                    <a:solidFill>
-                      <a:srgbClr val="FFFFFF"/>
-                    </a:solidFill>
-                  </a:tcPr>
-                </a:tc>
-                <a:tc>
-                  <a:txBody>
-                    <a:bodyPr/>
-                    <a:lstStyle/>
-                    <a:p>
-                      <a:endParaRPr/>
-                    </a:p>
-                  </a:txBody>
-                  <a:tcPr>
-                    <a:solidFill>
-                      <a:srgbClr val="FFFFFF"/>
-                    </a:solidFill>
-                  </a:tcPr>
-                </a:tc>
-                <a:extLst>
-                  <a:ext uri="{0D108BD9-81ED-4DB2-BD59-A6C34878D82A}">
-                    <a16:rowId xmlns:a16="http://schemas.microsoft.com/office/drawing/2014/main" val="10002"/>
-                  </a:ext>
-                </a:extLst>
-              </a:tr>
-              <a:tr h="529166">
-                <a:tc>
-                  <a:txBody>
-                    <a:bodyPr/>
-                    <a:lstStyle/>
-                    <a:p>
-                      <a:r>
-                        <a:rPr lang="en-US" dirty="0"/>
-                        <a:t>3</a:t>
-                      </a:r>
-                      <a:r>
-                        <a:rPr lang="en-US" baseline="30000" dirty="0"/>
-                        <a:t>rd</a:t>
-                      </a:r>
-                      <a:r>
-                        <a:rPr lang="en-US" dirty="0"/>
-                        <a:t> &amp; 1-2</a:t>
-                      </a:r>
-                      <a:endParaRPr dirty="0"/>
-                    </a:p>
-                  </a:txBody>
-                  <a:tcPr>
-                    <a:solidFill>
-                      <a:srgbClr val="F2F2F2"/>
-                    </a:solidFill>
-                  </a:tcPr>
-                </a:tc>
-                <a:tc>
-                  <a:txBody>
-                    <a:bodyPr/>
-                    <a:lstStyle/>
-                    <a:p>
-                      <a:endParaRPr dirty="0"/>
-                    </a:p>
-                  </a:txBody>
-                  <a:tcPr>
-                    <a:solidFill>
-                      <a:srgbClr val="F2F2F2"/>
-                    </a:solidFill>
-                  </a:tcPr>
-                </a:tc>
-                <a:extLst>
-                  <a:ext uri="{0D108BD9-81ED-4DB2-BD59-A6C34878D82A}">
-                    <a16:rowId xmlns:a16="http://schemas.microsoft.com/office/drawing/2014/main" val="10003"/>
-                  </a:ext>
-                </a:extLst>
-              </a:tr>
-            </a:tbl>
-          </a:graphicData>
-        </a:graphic>
-      </p:graphicFrame>
-      <p:sp>
-        <p:nvSpPr>
-          <p:cNvPr id="8" name="TextBox 7"/>
-          <p:cNvSpPr txBox="1"/>
-          <p:nvPr/>
-        </p:nvSpPr>
-        <p:spPr>
-          <a:xfrm>
-            <a:off x="6072367" y="889000"/>
-            <a:ext cx="2921000" cy="3175000"/>
-          </a:xfrm>
-          <a:prstGeom prst="rect">
-            <a:avLst/>
-          </a:prstGeom>
-          <a:noFill/>
-        </p:spPr>
-        <p:txBody>
-          <a:bodyPr wrap="none">
-            <a:spAutoFit/>
-          </a:bodyPr>
-          <a:lstStyle/>
-          <a:p>
-            <a:pPr>
-              <a:defRPr sz="1600" b="1"/>
-            </a:pPr>
-            <a:r>
-              <a:rPr dirty="0"/>
-              <a:t>Key Takeaways</a:t>
-            </a:r>
-          </a:p>
-          <a:p>
-            <a:pPr lvl="1">
-              <a:defRPr sz="1200"/>
-            </a:pPr>
-            <a:r>
-              <a:rPr dirty="0"/>
-              <a:t>🔥 Highlight tendencies ≥60%</a:t>
-            </a:r>
-          </a:p>
-          <a:p>
-            <a:pPr lvl="1">
-              <a:defRPr sz="1200"/>
-            </a:pPr>
-            <a:r>
-              <a:rPr dirty="0"/>
-              <a:t>⚠️ Pressure alerts</a:t>
-            </a:r>
-          </a:p>
-          <a:p>
-            <a:pPr lvl="1">
-              <a:defRPr sz="1200"/>
-            </a:pPr>
-            <a:r>
-              <a:rPr dirty="0"/>
-              <a:t>🛑 Red zone notes</a:t>
-            </a:r>
-          </a:p>
-          <a:p>
-            <a:pPr lvl="1">
-              <a:defRPr sz="1200"/>
-            </a:pPr>
-            <a:r>
-              <a:rPr dirty="0"/>
-              <a:t>AI-generated summary</a:t>
-            </a:r>
-          </a:p>
-        </p:txBody>
-      </p:sp>
       <p:sp>
         <p:nvSpPr>
           <p:cNvPr id="10" name="TextBox 9">
@@ -6125,15 +6079,398 @@
           <a:lstStyle/>
           <a:p>
             <a:pPr>
-              <a:defRPr sz="1100"/>
+              <a:defRPr sz="1100">
+                <a:solidFill>
+                  <a:srgbClr val="000000"/>
+                </a:solidFill>
+              </a:defRPr>
             </a:pPr>
             <a:r>
-              <a:rPr dirty="0"/>
-              <a:t>Opponent: ____________</a:t>
+              <a:t>Opponent: River Falls    Date: 07/30/2026</a:t>
             </a:r>
           </a:p>
         </p:txBody>
       </p:sp>
+      <p:graphicFrame>
+        <p:nvGraphicFramePr>
+          <p:cNvPr id="11" name="Table 10"/>
+          <p:cNvGraphicFramePr>
+            <a:graphicFrameLocks noGrp="1"/>
+          </p:cNvGraphicFramePr>
+          <p:nvPr/>
+        </p:nvGraphicFramePr>
+        <p:xfrm>
+          <a:off x="253999" y="889000"/>
+          <a:ext cx="8420872" cy="1803729"/>
+        </p:xfrm>
+        <a:graphic>
+          <a:graphicData uri="http://schemas.openxmlformats.org/drawingml/2006/table">
+            <a:tbl>
+              <a:tblPr firstRow="1" bandRow="1">
+                <a:tableStyleId>{5C22544A-7EE6-4342-B048-85BDC9FD1C3A}</a:tableStyleId>
+              </a:tblPr>
+              <a:tblGrid>
+                <a:gridCol w="2357844"/>
+                <a:gridCol w="1178922"/>
+                <a:gridCol w="4884106"/>
+              </a:tblGrid>
+              <a:tr h="216231">
+                <a:tc>
+                  <a:txBody>
+                    <a:bodyPr/>
+                    <a:lstStyle/>
+                    <a:p>
+                      <a:r>
+                        <a:rPr sz="1800" b="1">
+                          <a:solidFill>
+                            <a:srgbClr val="FFFFFF"/>
+                          </a:solidFill>
+                        </a:rPr>
+                        <a:t>Situation</a:t>
+                      </a:r>
+                    </a:p>
+                  </a:txBody>
+                  <a:tcPr marL="50800" marR="50800" marT="25400" marB="25400" anchor="ctr">
+                    <a:solidFill>
+                      <a:srgbClr val="BE0000"/>
+                    </a:solidFill>
+                  </a:tcPr>
+                </a:tc>
+                <a:tc>
+                  <a:txBody>
+                    <a:bodyPr/>
+                    <a:lstStyle/>
+                    <a:p>
+                      <a:r>
+                        <a:rPr sz="1800" b="1">
+                          <a:solidFill>
+                            <a:srgbClr val="FFFFFF"/>
+                          </a:solidFill>
+                        </a:rPr>
+                        <a:t>Total Plays</a:t>
+                      </a:r>
+                    </a:p>
+                  </a:txBody>
+                  <a:tcPr marL="50800" marR="50800" marT="25400" marB="25400" anchor="ctr">
+                    <a:solidFill>
+                      <a:srgbClr val="BE0000"/>
+                    </a:solidFill>
+                  </a:tcPr>
+                </a:tc>
+                <a:tc>
+                  <a:txBody>
+                    <a:bodyPr/>
+                    <a:lstStyle/>
+                    <a:p>
+                      <a:r>
+                        <a:rPr sz="1800" b="1">
+                          <a:solidFill>
+                            <a:srgbClr val="FFFFFF"/>
+                          </a:solidFill>
+                        </a:rPr>
+                        <a:t>Top 5 Front/Stunt/Blitz/Coverage Calls</a:t>
+                      </a:r>
+                    </a:p>
+                  </a:txBody>
+                  <a:tcPr marL="50800" marR="50800" marT="25400" marB="25400" anchor="ctr">
+                    <a:solidFill>
+                      <a:srgbClr val="BE0000"/>
+                    </a:solidFill>
+                  </a:tcPr>
+                </a:tc>
+              </a:tr>
+              <a:tr h="529166">
+                <a:tc>
+                  <a:txBody>
+                    <a:bodyPr/>
+                    <a:lstStyle/>
+                    <a:p>
+                      <a:r>
+                        <a:rPr sz="1800" b="0">
+                          <a:solidFill>
+                            <a:srgbClr val="000000"/>
+                          </a:solidFill>
+                        </a:rPr>
+                        <a:t>3rd &amp; 7+</a:t>
+                      </a:r>
+                    </a:p>
+                  </a:txBody>
+                  <a:tcPr marL="50800" marR="50800" marT="25400" marB="25400" anchor="ctr">
+                    <a:solidFill>
+                      <a:srgbClr val="F2F2F2"/>
+                    </a:solidFill>
+                  </a:tcPr>
+                </a:tc>
+                <a:tc>
+                  <a:txBody>
+                    <a:bodyPr/>
+                    <a:lstStyle/>
+                    <a:p/>
+                  </a:txBody>
+                  <a:tcPr marL="50800" marR="50800" marT="25400" marB="25400" anchor="ctr">
+                    <a:solidFill>
+                      <a:srgbClr val="F2F2F2"/>
+                    </a:solidFill>
+                  </a:tcPr>
+                </a:tc>
+                <a:tc>
+                  <a:txBody>
+                    <a:bodyPr/>
+                    <a:lstStyle/>
+                    <a:p>
+                      <a:r>
+                        <a:rPr sz="1200" b="0">
+                          <a:solidFill>
+                            <a:srgbClr val="000000"/>
+                          </a:solidFill>
+                        </a:rPr>
+                        <a:t>1. TUFF / - / - / COVER 2 (5 | 26.3%)</a:t>
+                      </a:r>
+                    </a:p>
+                    <a:p>
+                      <a:r>
+                        <a:rPr sz="1200" b="0">
+                          <a:solidFill>
+                            <a:srgbClr val="000000"/>
+                          </a:solidFill>
+                        </a:rPr>
+                        <a:t>2. TUFF / SLANT STRONG / RAW X / COVER 0 (2 | 10.5%)</a:t>
+                      </a:r>
+                    </a:p>
+                    <a:p>
+                      <a:r>
+                        <a:rPr sz="1200" b="0">
+                          <a:solidFill>
+                            <a:srgbClr val="000000"/>
+                          </a:solidFill>
+                        </a:rPr>
+                        <a:t>3. TUFF / TANK / - / COVER 2 (2 | 10.5%)</a:t>
+                      </a:r>
+                    </a:p>
+                    <a:p>
+                      <a:r>
+                        <a:rPr sz="1200" b="0">
+                          <a:solidFill>
+                            <a:srgbClr val="000000"/>
+                          </a:solidFill>
+                        </a:rPr>
+                        <a:t>4. TUFF / SLANT WEAK / - / COVER 2 (1 | 5.3%)</a:t>
+                      </a:r>
+                    </a:p>
+                    <a:p>
+                      <a:r>
+                        <a:rPr sz="1200" b="0">
+                          <a:solidFill>
+                            <a:srgbClr val="000000"/>
+                          </a:solidFill>
+                        </a:rPr>
+                        <a:t>5. MINT / SLANT WEAK / RATTLE X / COVER 0 (1 | 5.3%)</a:t>
+                      </a:r>
+                    </a:p>
+                  </a:txBody>
+                  <a:tcPr marL="50800" marR="50800" marT="25400" marB="25400" anchor="ctr">
+                    <a:solidFill>
+                      <a:srgbClr val="F2F2F2"/>
+                    </a:solidFill>
+                  </a:tcPr>
+                </a:tc>
+              </a:tr>
+              <a:tr h="529166">
+                <a:tc>
+                  <a:txBody>
+                    <a:bodyPr/>
+                    <a:lstStyle/>
+                    <a:p>
+                      <a:r>
+                        <a:rPr sz="1800" b="0">
+                          <a:solidFill>
+                            <a:srgbClr val="000000"/>
+                          </a:solidFill>
+                        </a:rPr>
+                        <a:t>3rd &amp; 3-6</a:t>
+                      </a:r>
+                    </a:p>
+                  </a:txBody>
+                  <a:tcPr marL="50800" marR="50800" marT="25400" marB="25400" anchor="ctr">
+                    <a:solidFill>
+                      <a:srgbClr val="F2F2F2"/>
+                    </a:solidFill>
+                  </a:tcPr>
+                </a:tc>
+                <a:tc>
+                  <a:txBody>
+                    <a:bodyPr/>
+                    <a:lstStyle/>
+                    <a:p/>
+                  </a:txBody>
+                  <a:tcPr marL="50800" marR="50800" marT="25400" marB="25400" anchor="ctr">
+                    <a:solidFill>
+                      <a:srgbClr val="F2F2F2"/>
+                    </a:solidFill>
+                  </a:tcPr>
+                </a:tc>
+                <a:tc>
+                  <a:txBody>
+                    <a:bodyPr/>
+                    <a:lstStyle/>
+                    <a:p>
+                      <a:r>
+                        <a:rPr sz="1200" b="0">
+                          <a:solidFill>
+                            <a:srgbClr val="000000"/>
+                          </a:solidFill>
+                        </a:rPr>
+                        <a:t>1. TUFF / - / - / COVER 2 (2 | 18.2%)</a:t>
+                      </a:r>
+                    </a:p>
+                    <a:p>
+                      <a:r>
+                        <a:rPr sz="1200" b="0">
+                          <a:solidFill>
+                            <a:srgbClr val="000000"/>
+                          </a:solidFill>
+                        </a:rPr>
+                        <a:t>2. 404 / SLANT WEAK / RAM X / COVER 0 (1 | 9.1%)</a:t>
+                      </a:r>
+                    </a:p>
+                    <a:p>
+                      <a:r>
+                        <a:rPr sz="1200" b="0">
+                          <a:solidFill>
+                            <a:srgbClr val="000000"/>
+                          </a:solidFill>
+                        </a:rPr>
+                        <a:t>3. TUFF / SLANT WEAK / - / COVER 2 (1 | 9.1%)</a:t>
+                      </a:r>
+                    </a:p>
+                    <a:p>
+                      <a:r>
+                        <a:rPr sz="1200" b="0">
+                          <a:solidFill>
+                            <a:srgbClr val="000000"/>
+                          </a:solidFill>
+                        </a:rPr>
+                        <a:t>4. TUFF / NAIL / - / COVER 2 (1 | 9.1%)</a:t>
+                      </a:r>
+                    </a:p>
+                    <a:p>
+                      <a:r>
+                        <a:rPr sz="1200" b="0">
+                          <a:solidFill>
+                            <a:srgbClr val="000000"/>
+                          </a:solidFill>
+                        </a:rPr>
+                        <a:t>5. TITE / CRASH / WOLF X / COVER 2 (1 | 9.1%)</a:t>
+                      </a:r>
+                    </a:p>
+                  </a:txBody>
+                  <a:tcPr marL="50800" marR="50800" marT="25400" marB="25400" anchor="ctr">
+                    <a:solidFill>
+                      <a:srgbClr val="F2F2F2"/>
+                    </a:solidFill>
+                  </a:tcPr>
+                </a:tc>
+              </a:tr>
+              <a:tr h="529166">
+                <a:tc>
+                  <a:txBody>
+                    <a:bodyPr/>
+                    <a:lstStyle/>
+                    <a:p>
+                      <a:r>
+                        <a:rPr sz="1800" b="0">
+                          <a:solidFill>
+                            <a:srgbClr val="000000"/>
+                          </a:solidFill>
+                        </a:rPr>
+                        <a:t>3rd &amp; 1-2</a:t>
+                      </a:r>
+                    </a:p>
+                  </a:txBody>
+                  <a:tcPr marL="50800" marR="50800" marT="25400" marB="25400" anchor="ctr">
+                    <a:solidFill>
+                      <a:srgbClr val="F2F2F2"/>
+                    </a:solidFill>
+                  </a:tcPr>
+                </a:tc>
+                <a:tc>
+                  <a:txBody>
+                    <a:bodyPr/>
+                    <a:lstStyle/>
+                    <a:p/>
+                  </a:txBody>
+                  <a:tcPr marL="50800" marR="50800" marT="25400" marB="25400" anchor="ctr">
+                    <a:solidFill>
+                      <a:srgbClr val="F2F2F2"/>
+                    </a:solidFill>
+                  </a:tcPr>
+                </a:tc>
+                <a:tc>
+                  <a:txBody>
+                    <a:bodyPr/>
+                    <a:lstStyle/>
+                    <a:p>
+                      <a:r>
+                        <a:rPr sz="1200" b="0">
+                          <a:solidFill>
+                            <a:srgbClr val="000000"/>
+                          </a:solidFill>
+                        </a:rPr>
+                        <a:t>1. BASE / - / - / - (1 | 14.3%)</a:t>
+                      </a:r>
+                    </a:p>
+                    <a:p>
+                      <a:r>
+                        <a:rPr sz="1200" b="0">
+                          <a:solidFill>
+                            <a:srgbClr val="000000"/>
+                          </a:solidFill>
+                        </a:rPr>
+                        <a:t>2. TUFF / SLANT WEAK / - / COVER 4 (1 | 14.3%)</a:t>
+                      </a:r>
+                    </a:p>
+                    <a:p>
+                      <a:r>
+                        <a:rPr sz="1200" b="0">
+                          <a:solidFill>
+                            <a:srgbClr val="000000"/>
+                          </a:solidFill>
+                        </a:rPr>
+                        <a:t>3. 404 / SLANT WEAK / COBRA / GEEN (1 | 14.3%)</a:t>
+                      </a:r>
+                    </a:p>
+                    <a:p>
+                      <a:r>
+                        <a:rPr sz="1200" b="0">
+                          <a:solidFill>
+                            <a:srgbClr val="000000"/>
+                          </a:solidFill>
+                        </a:rPr>
+                        <a:t>4. TUFF / SLANT STRONG / RAW X / COVER 0 (1 | 14.3%)</a:t>
+                      </a:r>
+                    </a:p>
+                    <a:p>
+                      <a:r>
+                        <a:rPr sz="1200" b="0">
+                          <a:solidFill>
+                            <a:srgbClr val="000000"/>
+                          </a:solidFill>
+                        </a:rPr>
+                        <a:t>5. TITE / CRASH / SNAKE / COVER 0 (1 | 14.3%)</a:t>
+                      </a:r>
+                    </a:p>
+                  </a:txBody>
+                  <a:tcPr marL="50800" marR="50800" marT="25400" marB="25400" anchor="ctr">
+                    <a:solidFill>
+                      <a:srgbClr val="F2F2F2"/>
+                    </a:solidFill>
+                  </a:tcPr>
+                </a:tc>
+              </a:tr>
+            </a:tbl>
+          </a:graphicData>
+        </a:graphic>
+      </p:graphicFrame>
     </p:spTree>
   </p:cSld>
   <p:clrMapOvr>
@@ -6309,32 +6646,29 @@
           <a:lstStyle/>
           <a:p>
             <a:pPr>
-              <a:defRPr sz="1100"/>
+              <a:defRPr sz="1100">
+                <a:solidFill>
+                  <a:srgbClr val="000000"/>
+                </a:solidFill>
+              </a:defRPr>
             </a:pPr>
             <a:r>
-              <a:rPr dirty="0"/>
-              <a:t>Opponent: ____________</a:t>
+              <a:t>Opponent: River Falls    Date: 07/30/2026</a:t>
             </a:r>
           </a:p>
         </p:txBody>
       </p:sp>
       <p:graphicFrame>
         <p:nvGraphicFramePr>
-          <p:cNvPr id="7" name="Table 6"/>
+          <p:cNvPr id="6" name="Table 5"/>
           <p:cNvGraphicFramePr>
             <a:graphicFrameLocks noGrp="1"/>
           </p:cNvGraphicFramePr>
-          <p:nvPr>
-            <p:extLst>
-              <p:ext uri="{D42A27DB-BD31-4B8C-83A1-F6EECF244321}">
-                <p14:modId xmlns:p14="http://schemas.microsoft.com/office/powerpoint/2010/main" val="1853399203"/>
-              </p:ext>
-            </p:extLst>
-          </p:nvPr>
+          <p:nvPr/>
         </p:nvGraphicFramePr>
         <p:xfrm>
-          <a:off x="254000" y="889000"/>
-          <a:ext cx="5715000" cy="1861818"/>
+          <a:off x="253999" y="889000"/>
+          <a:ext cx="8349310" cy="1740119"/>
         </p:xfrm>
         <a:graphic>
           <a:graphicData uri="http://schemas.openxmlformats.org/drawingml/2006/table">
@@ -6343,20 +6677,9 @@
                 <a:tableStyleId>{5C22544A-7EE6-4342-B048-85BDC9FD1C3A}</a:tableStyleId>
               </a:tblPr>
               <a:tblGrid>
-                <a:gridCol w="2857500">
-                  <a:extLst>
-                    <a:ext uri="{9D8B030D-6E8A-4147-A177-3AD203B41FA5}">
-                      <a16:colId xmlns:a16="http://schemas.microsoft.com/office/drawing/2014/main" val="20000"/>
-                    </a:ext>
-                  </a:extLst>
-                </a:gridCol>
-                <a:gridCol w="2857500">
-                  <a:extLst>
-                    <a:ext uri="{9D8B030D-6E8A-4147-A177-3AD203B41FA5}">
-                      <a16:colId xmlns:a16="http://schemas.microsoft.com/office/drawing/2014/main" val="20001"/>
-                    </a:ext>
-                  </a:extLst>
-                </a:gridCol>
+                <a:gridCol w="2337807"/>
+                <a:gridCol w="1168903"/>
+                <a:gridCol w="4842600"/>
               </a:tblGrid>
               <a:tr h="152621">
                 <a:tc>
@@ -6364,9 +6687,8 @@
                     <a:bodyPr/>
                     <a:lstStyle/>
                     <a:p>
-                      <a:pPr algn="ctr"/>
-                      <a:r>
-                        <a:rPr sz="1200" dirty="0">
+                      <a:r>
+                        <a:rPr sz="1800" b="1">
                           <a:solidFill>
                             <a:srgbClr val="FFFFFF"/>
                           </a:solidFill>
@@ -6375,7 +6697,7 @@
                       </a:r>
                     </a:p>
                   </a:txBody>
-                  <a:tcPr>
+                  <a:tcPr marL="50800" marR="50800" marT="25400" marB="25400" anchor="ctr">
                     <a:solidFill>
                       <a:srgbClr val="BE0000"/>
                     </a:solidFill>
@@ -6386,28 +6708,43 @@
                     <a:bodyPr/>
                     <a:lstStyle/>
                     <a:p>
-                      <a:pPr algn="ctr"/>
-                      <a:r>
-                        <a:rPr sz="1200" dirty="0">
+                      <a:r>
+                        <a:rPr sz="1800" b="1">
                           <a:solidFill>
                             <a:srgbClr val="FFFFFF"/>
                           </a:solidFill>
                         </a:rPr>
+                        <a:t>Total Plays</a:t>
+                      </a:r>
+                    </a:p>
+                  </a:txBody>
+                  <a:tcPr marL="50800" marR="50800" marT="25400" marB="25400" anchor="ctr">
+                    <a:solidFill>
+                      <a:srgbClr val="BE0000"/>
+                    </a:solidFill>
+                  </a:tcPr>
+                </a:tc>
+                <a:tc>
+                  <a:txBody>
+                    <a:bodyPr/>
+                    <a:lstStyle/>
+                    <a:p>
+                      <a:r>
+                        <a:rPr sz="1800" b="1">
+                          <a:solidFill>
+                            <a:srgbClr val="FFFFFF"/>
+                          </a:solidFill>
+                        </a:rPr>
                         <a:t>Top 5 Front/Stunt/Blitz/Coverage Calls</a:t>
                       </a:r>
                     </a:p>
                   </a:txBody>
-                  <a:tcPr>
+                  <a:tcPr marL="50800" marR="50800" marT="25400" marB="25400" anchor="ctr">
                     <a:solidFill>
                       <a:srgbClr val="BE0000"/>
                     </a:solidFill>
                   </a:tcPr>
                 </a:tc>
-                <a:extLst>
-                  <a:ext uri="{0D108BD9-81ED-4DB2-BD59-A6C34878D82A}">
-                    <a16:rowId xmlns:a16="http://schemas.microsoft.com/office/drawing/2014/main" val="10000"/>
-                  </a:ext>
-                </a:extLst>
               </a:tr>
               <a:tr h="529166">
                 <a:tc>
@@ -6415,19 +6752,17 @@
                     <a:bodyPr/>
                     <a:lstStyle/>
                     <a:p>
-                      <a:pPr algn="ctr"/>
-                      <a:r>
-                        <a:rPr sz="1200" dirty="0"/>
-                        <a:t>High Red Zone</a:t>
-                      </a:r>
-                      <a:r>
-                        <a:rPr lang="en-US" sz="1200" dirty="0"/>
-                        <a:t> (25-15)</a:t>
-                      </a:r>
-                      <a:endParaRPr sz="1200" dirty="0"/>
-                    </a:p>
-                  </a:txBody>
-                  <a:tcPr>
+                      <a:r>
+                        <a:rPr sz="1800" b="0">
+                          <a:solidFill>
+                            <a:srgbClr val="000000"/>
+                          </a:solidFill>
+                        </a:rPr>
+                        <a:t>High Red Zone (25-15)</a:t>
+                      </a:r>
+                    </a:p>
+                  </a:txBody>
+                  <a:tcPr marL="50800" marR="50800" marT="25400" marB="25400" anchor="ctr">
                     <a:solidFill>
                       <a:srgbClr val="F2F2F2"/>
                     </a:solidFill>
@@ -6437,22 +6772,75 @@
                   <a:txBody>
                     <a:bodyPr/>
                     <a:lstStyle/>
-                    <a:p>
-                      <a:pPr algn="ctr"/>
-                      <a:endParaRPr sz="1200" dirty="0"/>
-                    </a:p>
-                  </a:txBody>
-                  <a:tcPr>
+                    <a:p/>
+                  </a:txBody>
+                  <a:tcPr marL="50800" marR="50800" marT="25400" marB="25400">
                     <a:solidFill>
                       <a:srgbClr val="F2F2F2"/>
                     </a:solidFill>
                   </a:tcPr>
                 </a:tc>
-                <a:extLst>
-                  <a:ext uri="{0D108BD9-81ED-4DB2-BD59-A6C34878D82A}">
-                    <a16:rowId xmlns:a16="http://schemas.microsoft.com/office/drawing/2014/main" val="10001"/>
-                  </a:ext>
-                </a:extLst>
+                <a:tc>
+                  <a:txBody>
+                    <a:bodyPr/>
+                    <a:lstStyle/>
+                    <a:p>
+                      <a:r>
+                        <a:rPr sz="1400" b="0">
+                          <a:solidFill>
+                            <a:srgbClr val="000000"/>
+                          </a:solidFill>
+                        </a:rPr>
+                        <a:t>1. TUFF / - / - / COVER 2 (2 | 18.2%)</a:t>
+                      </a:r>
+                    </a:p>
+                    <a:p>
+                      <a:r>
+                        <a:rPr sz="1400" b="0">
+                          <a:solidFill>
+                            <a:srgbClr val="000000"/>
+                          </a:solidFill>
+                        </a:rPr>
+                        <a:t>2. 404 / CRASH / SNAKE / ORAGNE (1 | 9.1%)</a:t>
+                      </a:r>
+                    </a:p>
+                    <a:p>
+                      <a:r>
+                        <a:rPr sz="1400" b="0">
+                          <a:solidFill>
+                            <a:srgbClr val="000000"/>
+                          </a:solidFill>
+                        </a:rPr>
+                        <a:t>3. 404 / - / - / COVER 0 (1 | 9.1%)</a:t>
+                      </a:r>
+                    </a:p>
+                    <a:p>
+                      <a:r>
+                        <a:rPr sz="1400" b="0">
+                          <a:solidFill>
+                            <a:srgbClr val="000000"/>
+                          </a:solidFill>
+                        </a:rPr>
+                        <a:t>4. TUFF / - / - / - (1 | 9.1%)</a:t>
+                      </a:r>
+                    </a:p>
+                    <a:p>
+                      <a:r>
+                        <a:rPr sz="1400" b="0">
+                          <a:solidFill>
+                            <a:srgbClr val="000000"/>
+                          </a:solidFill>
+                        </a:rPr>
+                        <a:t>5. - / - / - / - (1 | 9.1%)</a:t>
+                      </a:r>
+                    </a:p>
+                  </a:txBody>
+                  <a:tcPr marL="50800" marR="50800" marT="25400" marB="25400">
+                    <a:solidFill>
+                      <a:srgbClr val="F2F2F2"/>
+                    </a:solidFill>
+                  </a:tcPr>
+                </a:tc>
               </a:tr>
               <a:tr h="529166">
                 <a:tc>
@@ -6460,44 +6848,95 @@
                     <a:bodyPr/>
                     <a:lstStyle/>
                     <a:p>
-                      <a:pPr algn="ctr"/>
-                      <a:r>
-                        <a:rPr sz="1200" dirty="0"/>
-                        <a:t>Red Zone</a:t>
-                      </a:r>
-                      <a:r>
-                        <a:rPr lang="en-US" sz="1200" dirty="0"/>
-                        <a:t> (15-5)</a:t>
-                      </a:r>
-                      <a:endParaRPr sz="1200" dirty="0"/>
-                    </a:p>
-                  </a:txBody>
-                  <a:tcPr>
-                    <a:solidFill>
-                      <a:srgbClr val="FFFFFF"/>
-                    </a:solidFill>
-                  </a:tcPr>
-                </a:tc>
-                <a:tc>
-                  <a:txBody>
-                    <a:bodyPr/>
-                    <a:lstStyle/>
-                    <a:p>
-                      <a:pPr algn="ctr"/>
-                      <a:endParaRPr sz="1200" dirty="0"/>
-                    </a:p>
-                  </a:txBody>
-                  <a:tcPr>
-                    <a:solidFill>
-                      <a:srgbClr val="FFFFFF"/>
-                    </a:solidFill>
-                  </a:tcPr>
-                </a:tc>
-                <a:extLst>
-                  <a:ext uri="{0D108BD9-81ED-4DB2-BD59-A6C34878D82A}">
-                    <a16:rowId xmlns:a16="http://schemas.microsoft.com/office/drawing/2014/main" val="10002"/>
-                  </a:ext>
-                </a:extLst>
+                      <a:r>
+                        <a:rPr sz="1800" b="0">
+                          <a:solidFill>
+                            <a:srgbClr val="000000"/>
+                          </a:solidFill>
+                        </a:rPr>
+                        <a:t>Red Zone (15-5)</a:t>
+                      </a:r>
+                    </a:p>
+                  </a:txBody>
+                  <a:tcPr marL="50800" marR="50800" marT="25400" marB="25400" anchor="ctr">
+                    <a:solidFill>
+                      <a:srgbClr val="F2F2F2"/>
+                    </a:solidFill>
+                  </a:tcPr>
+                </a:tc>
+                <a:tc>
+                  <a:txBody>
+                    <a:bodyPr/>
+                    <a:lstStyle/>
+                    <a:p/>
+                  </a:txBody>
+                  <a:tcPr marL="50800" marR="50800" marT="25400" marB="25400">
+                    <a:solidFill>
+                      <a:srgbClr val="F2F2F2"/>
+                    </a:solidFill>
+                  </a:tcPr>
+                </a:tc>
+                <a:tc>
+                  <a:txBody>
+                    <a:bodyPr/>
+                    <a:lstStyle/>
+                    <a:p>
+                      <a:r>
+                        <a:rPr sz="1400" b="0">
+                          <a:solidFill>
+                            <a:srgbClr val="000000"/>
+                          </a:solidFill>
+                        </a:rPr>
+                        <a:t>1. TUFF / TANK / - / COVER 2 (2 | 28.6%)</a:t>
+                      </a:r>
+                    </a:p>
+                    <a:p>
+                      <a:r>
+                        <a:rPr sz="1400" b="0">
+                          <a:solidFill>
+                            <a:srgbClr val="000000"/>
+                          </a:solidFill>
+                        </a:rPr>
+                        <a:t>2. 404 / CRASH / SNAKE / COVER 0 (1 | 14.3%)</a:t>
+                      </a:r>
+                    </a:p>
+                    <a:p>
+                      <a:r>
+                        <a:rPr sz="1400" b="0">
+                          <a:solidFill>
+                            <a:srgbClr val="000000"/>
+                          </a:solidFill>
+                        </a:rPr>
+                        <a:t>3. 515 / - / - / COVER 2 (1 | 14.3%)</a:t>
+                      </a:r>
+                    </a:p>
+                    <a:p>
+                      <a:r>
+                        <a:rPr sz="1400" b="0">
+                          <a:solidFill>
+                            <a:srgbClr val="000000"/>
+                          </a:solidFill>
+                        </a:rPr>
+                        <a:t>4. TITE / CRASH / WORM / COVER 0 (1 | 14.3%)</a:t>
+                      </a:r>
+                    </a:p>
+                    <a:p>
+                      <a:r>
+                        <a:rPr sz="1400" b="0">
+                          <a:solidFill>
+                            <a:srgbClr val="000000"/>
+                          </a:solidFill>
+                        </a:rPr>
+                        <a:t>5. RNR / SLANT STRONG / COBRA / COVER 0 (1 | 14.3%)</a:t>
+                      </a:r>
+                    </a:p>
+                  </a:txBody>
+                  <a:tcPr marL="50800" marR="50800" marT="25400" marB="25400">
+                    <a:solidFill>
+                      <a:srgbClr val="F2F2F2"/>
+                    </a:solidFill>
+                  </a:tcPr>
+                </a:tc>
               </a:tr>
               <a:tr h="529166">
                 <a:tc>
@@ -6505,19 +6944,17 @@
                     <a:bodyPr/>
                     <a:lstStyle/>
                     <a:p>
-                      <a:pPr algn="ctr"/>
-                      <a:r>
-                        <a:rPr sz="1200" dirty="0"/>
-                        <a:t>Goal Line</a:t>
-                      </a:r>
-                      <a:r>
-                        <a:rPr lang="en-US" sz="1200" dirty="0"/>
-                        <a:t> (Inside the 5)</a:t>
-                      </a:r>
-                      <a:endParaRPr sz="1200" dirty="0"/>
-                    </a:p>
-                  </a:txBody>
-                  <a:tcPr>
+                      <a:r>
+                        <a:rPr sz="1800" b="0">
+                          <a:solidFill>
+                            <a:srgbClr val="000000"/>
+                          </a:solidFill>
+                        </a:rPr>
+                        <a:t>Goal Line (Inside the 5)</a:t>
+                      </a:r>
+                    </a:p>
+                  </a:txBody>
+                  <a:tcPr marL="50800" marR="50800" marT="25400" marB="25400" anchor="ctr">
                     <a:solidFill>
                       <a:srgbClr val="F2F2F2"/>
                     </a:solidFill>
@@ -6527,90 +6964,60 @@
                   <a:txBody>
                     <a:bodyPr/>
                     <a:lstStyle/>
-                    <a:p>
-                      <a:pPr algn="ctr"/>
-                      <a:endParaRPr sz="1200" dirty="0"/>
-                    </a:p>
-                  </a:txBody>
-                  <a:tcPr>
+                    <a:p/>
+                  </a:txBody>
+                  <a:tcPr marL="50800" marR="50800" marT="25400" marB="25400">
                     <a:solidFill>
                       <a:srgbClr val="F2F2F2"/>
                     </a:solidFill>
                   </a:tcPr>
                 </a:tc>
-                <a:extLst>
-                  <a:ext uri="{0D108BD9-81ED-4DB2-BD59-A6C34878D82A}">
-                    <a16:rowId xmlns:a16="http://schemas.microsoft.com/office/drawing/2014/main" val="10003"/>
-                  </a:ext>
-                </a:extLst>
+                <a:tc>
+                  <a:txBody>
+                    <a:bodyPr/>
+                    <a:lstStyle/>
+                    <a:p>
+                      <a:r>
+                        <a:rPr sz="1400" b="0">
+                          <a:solidFill>
+                            <a:srgbClr val="000000"/>
+                          </a:solidFill>
+                        </a:rPr>
+                        <a:t>1. TITE / SLANT WEAK / RAM X / COVER 0 (1 | 33.3%)</a:t>
+                      </a:r>
+                    </a:p>
+                    <a:p>
+                      <a:r>
+                        <a:rPr sz="1400" b="0">
+                          <a:solidFill>
+                            <a:srgbClr val="000000"/>
+                          </a:solidFill>
+                        </a:rPr>
+                        <a:t>2. TUFF / SUB / - / COVER 0 (1 | 33.3%)</a:t>
+                      </a:r>
+                    </a:p>
+                    <a:p>
+                      <a:r>
+                        <a:rPr sz="1400" b="0">
+                          <a:solidFill>
+                            <a:srgbClr val="000000"/>
+                          </a:solidFill>
+                        </a:rPr>
+                        <a:t>3. BEAR / - / MOW / COVER 0 (1 | 33.3%)</a:t>
+                      </a:r>
+                    </a:p>
+                  </a:txBody>
+                  <a:tcPr marL="50800" marR="50800" marT="25400" marB="25400">
+                    <a:solidFill>
+                      <a:srgbClr val="F2F2F2"/>
+                    </a:solidFill>
+                  </a:tcPr>
+                </a:tc>
               </a:tr>
             </a:tbl>
           </a:graphicData>
         </a:graphic>
       </p:graphicFrame>
-      <p:sp>
-        <p:nvSpPr>
-          <p:cNvPr id="8" name="TextBox 7"/>
-          <p:cNvSpPr txBox="1"/>
-          <p:nvPr/>
-        </p:nvSpPr>
-        <p:spPr>
-          <a:xfrm>
-            <a:off x="5969000" y="889000"/>
-            <a:ext cx="2921000" cy="3175000"/>
-          </a:xfrm>
-          <a:prstGeom prst="rect">
-            <a:avLst/>
-          </a:prstGeom>
-          <a:noFill/>
-        </p:spPr>
-        <p:txBody>
-          <a:bodyPr wrap="none">
-            <a:spAutoFit/>
-          </a:bodyPr>
-          <a:lstStyle/>
-          <a:p>
-            <a:pPr>
-              <a:defRPr sz="1600" b="1"/>
-            </a:pPr>
-            <a:r>
-              <a:t>Key Takeaways</a:t>
-            </a:r>
-          </a:p>
-          <a:p>
-            <a:pPr lvl="1">
-              <a:defRPr sz="1200"/>
-            </a:pPr>
-            <a:r>
-              <a:t>🔥 Highlight tendencies ≥60%</a:t>
-            </a:r>
-          </a:p>
-          <a:p>
-            <a:pPr lvl="1">
-              <a:defRPr sz="1200"/>
-            </a:pPr>
-            <a:r>
-              <a:t>⚠️ Pressure alerts</a:t>
-            </a:r>
-          </a:p>
-          <a:p>
-            <a:pPr lvl="1">
-              <a:defRPr sz="1200"/>
-            </a:pPr>
-            <a:r>
-              <a:t>🛑 Red zone notes</a:t>
-            </a:r>
-          </a:p>
-          <a:p>
-            <a:pPr lvl="1">
-              <a:defRPr sz="1200"/>
-            </a:pPr>
-            <a:r>
-              <a:t>AI-generated summary</a:t>
-            </a:r>
-          </a:p>
-        </p:txBody>
-      </p:sp>
     </p:spTree>
   </p:cSld>
   <p:clrMapOvr>
@@ -6772,14 +7179,14 @@
           <p:nvPr>
             <p:extLst>
               <p:ext uri="{D42A27DB-BD31-4B8C-83A1-F6EECF244321}">
-                <p14:modId xmlns:p14="http://schemas.microsoft.com/office/powerpoint/2010/main" val="3222888708"/>
+                <p14:modId xmlns:p14="http://schemas.microsoft.com/office/powerpoint/2010/main" val="3094574080"/>
               </p:ext>
             </p:extLst>
           </p:nvPr>
         </p:nvGraphicFramePr>
         <p:xfrm>
           <a:off x="254000" y="889000"/>
-          <a:ext cx="5461000" cy="3011594"/>
+          <a:ext cx="8476532" cy="2970954"/>
         </p:xfrm>
         <a:graphic>
           <a:graphicData uri="http://schemas.openxmlformats.org/drawingml/2006/table">
@@ -6788,28 +7195,28 @@
                 <a:tableStyleId>{5C22544A-7EE6-4342-B048-85BDC9FD1C3A}</a:tableStyleId>
               </a:tblPr>
               <a:tblGrid>
-                <a:gridCol w="1365250">
+                <a:gridCol w="2119133">
                   <a:extLst>
                     <a:ext uri="{9D8B030D-6E8A-4147-A177-3AD203B41FA5}">
                       <a16:colId xmlns:a16="http://schemas.microsoft.com/office/drawing/2014/main" val="20000"/>
                     </a:ext>
                   </a:extLst>
                 </a:gridCol>
-                <a:gridCol w="1365250">
+                <a:gridCol w="2119133">
                   <a:extLst>
                     <a:ext uri="{9D8B030D-6E8A-4147-A177-3AD203B41FA5}">
                       <a16:colId xmlns:a16="http://schemas.microsoft.com/office/drawing/2014/main" val="20001"/>
                     </a:ext>
                   </a:extLst>
                 </a:gridCol>
-                <a:gridCol w="1365250">
+                <a:gridCol w="2119133">
                   <a:extLst>
                     <a:ext uri="{9D8B030D-6E8A-4147-A177-3AD203B41FA5}">
                       <a16:colId xmlns:a16="http://schemas.microsoft.com/office/drawing/2014/main" val="20002"/>
                     </a:ext>
                   </a:extLst>
                 </a:gridCol>
-                <a:gridCol w="1365250">
+                <a:gridCol w="2119133">
                   <a:extLst>
                     <a:ext uri="{9D8B030D-6E8A-4147-A177-3AD203B41FA5}">
                       <a16:colId xmlns:a16="http://schemas.microsoft.com/office/drawing/2014/main" val="20003"/>
@@ -6825,7 +7232,7 @@
                     <a:p>
                       <a:pPr algn="ctr"/>
                       <a:r>
-                        <a:rPr dirty="0">
+                        <a:rPr sz="1800" b="1">
                           <a:solidFill>
                             <a:srgbClr val="FFFFFF"/>
                           </a:solidFill>
@@ -6834,7 +7241,7 @@
                       </a:r>
                     </a:p>
                   </a:txBody>
-                  <a:tcPr>
+                  <a:tcPr marL="50800" marR="50800" marT="25400" marB="25400" anchor="ctr">
                     <a:solidFill>
                       <a:srgbClr val="BE0000"/>
                     </a:solidFill>
@@ -6847,7 +7254,7 @@
                     <a:p>
                       <a:pPr algn="ctr"/>
                       <a:r>
-                        <a:rPr dirty="0">
+                        <a:rPr sz="1800" b="1">
                           <a:solidFill>
                             <a:srgbClr val="FFFFFF"/>
                           </a:solidFill>
@@ -6856,7 +7263,7 @@
                       </a:r>
                     </a:p>
                   </a:txBody>
-                  <a:tcPr>
+                  <a:tcPr marL="50800" marR="50800" marT="25400" marB="25400" anchor="ctr">
                     <a:solidFill>
                       <a:srgbClr val="BE0000"/>
                     </a:solidFill>
@@ -6869,7 +7276,7 @@
                     <a:p>
                       <a:pPr algn="ctr"/>
                       <a:r>
-                        <a:rPr dirty="0">
+                        <a:rPr sz="1800" b="1">
                           <a:solidFill>
                             <a:srgbClr val="FFFFFF"/>
                           </a:solidFill>
@@ -6878,7 +7285,7 @@
                       </a:r>
                     </a:p>
                   </a:txBody>
-                  <a:tcPr>
+                  <a:tcPr marL="50800" marR="50800" marT="25400" marB="25400" anchor="ctr">
                     <a:solidFill>
                       <a:srgbClr val="BE0000"/>
                     </a:solidFill>
@@ -6891,7 +7298,7 @@
                     <a:p>
                       <a:pPr algn="ctr"/>
                       <a:r>
-                        <a:rPr dirty="0">
+                        <a:rPr sz="1800" b="1">
                           <a:solidFill>
                             <a:srgbClr val="FFFFFF"/>
                           </a:solidFill>
@@ -6900,7 +7307,7 @@
                       </a:r>
                     </a:p>
                   </a:txBody>
-                  <a:tcPr>
+                  <a:tcPr marL="50800" marR="50800" marT="25400" marB="25400" anchor="ctr">
                     <a:solidFill>
                       <a:srgbClr val="BE0000"/>
                     </a:solidFill>
@@ -6920,12 +7327,16 @@
                     <a:p>
                       <a:pPr algn="ctr"/>
                       <a:r>
-                        <a:rPr sz="1400" dirty="0"/>
-                        <a:t>Top Formations</a:t>
-                      </a:r>
-                    </a:p>
-                  </a:txBody>
-                  <a:tcPr>
+                        <a:rPr sz="1800" b="0">
+                          <a:solidFill>
+                            <a:srgbClr val="000000"/>
+                          </a:solidFill>
+                        </a:rPr>
+                        <a:t>FLANK</a:t>
+                      </a:r>
+                    </a:p>
+                  </a:txBody>
+                  <a:tcPr marL="50800" marR="50800" marT="25400" marB="25400" anchor="ctr">
                     <a:solidFill>
                       <a:srgbClr val="F2F2F2"/>
                     </a:solidFill>
@@ -6937,10 +7348,17 @@
                     <a:lstStyle/>
                     <a:p>
                       <a:pPr algn="ctr"/>
-                      <a:endParaRPr sz="1400" dirty="0"/>
-                    </a:p>
-                  </a:txBody>
-                  <a:tcPr>
+                      <a:r>
+                        <a:rPr sz="1800" b="0">
+                          <a:solidFill>
+                            <a:srgbClr val="000000"/>
+                          </a:solidFill>
+                        </a:rPr>
+                        <a:t>TUFF (25.0%)</a:t>
+                      </a:r>
+                    </a:p>
+                  </a:txBody>
+                  <a:tcPr marL="50800" marR="50800" marT="25400" marB="25400" anchor="ctr">
                     <a:solidFill>
                       <a:srgbClr val="F2F2F2"/>
                     </a:solidFill>
@@ -6952,10 +7370,17 @@
                     <a:lstStyle/>
                     <a:p>
                       <a:pPr algn="ctr"/>
-                      <a:endParaRPr sz="1400"/>
-                    </a:p>
-                  </a:txBody>
-                  <a:tcPr>
+                      <a:r>
+                        <a:rPr sz="1800" b="1">
+                          <a:solidFill>
+                            <a:srgbClr val="BE0000"/>
+                          </a:solidFill>
+                        </a:rPr>
+                        <a:t>62.5%</a:t>
+                      </a:r>
+                    </a:p>
+                  </a:txBody>
+                  <a:tcPr marL="50800" marR="50800" marT="25400" marB="25400" anchor="ctr">
                     <a:solidFill>
                       <a:srgbClr val="F2F2F2"/>
                     </a:solidFill>
@@ -6967,10 +7392,17 @@
                     <a:lstStyle/>
                     <a:p>
                       <a:pPr algn="ctr"/>
-                      <a:endParaRPr sz="1400"/>
-                    </a:p>
-                  </a:txBody>
-                  <a:tcPr>
+                      <a:r>
+                        <a:rPr sz="1800" b="0">
+                          <a:solidFill>
+                            <a:srgbClr val="000000"/>
+                          </a:solidFill>
+                        </a:rPr>
+                        <a:t>COVER 0 (70.8%)</a:t>
+                      </a:r>
+                    </a:p>
+                  </a:txBody>
+                  <a:tcPr marL="50800" marR="50800" marT="25400" marB="25400" anchor="ctr">
                     <a:solidFill>
                       <a:srgbClr val="F2F2F2"/>
                     </a:solidFill>
@@ -6989,10 +7421,17 @@
                     <a:lstStyle/>
                     <a:p>
                       <a:pPr algn="ctr"/>
-                      <a:endParaRPr sz="1400"/>
-                    </a:p>
-                  </a:txBody>
-                  <a:tcPr>
+                      <a:r>
+                        <a:rPr sz="1800" b="0">
+                          <a:solidFill>
+                            <a:srgbClr val="000000"/>
+                          </a:solidFill>
+                        </a:rPr>
+                        <a:t>DEUCE</a:t>
+                      </a:r>
+                    </a:p>
+                  </a:txBody>
+                  <a:tcPr marL="50800" marR="50800" marT="25400" marB="25400" anchor="ctr">
                     <a:solidFill>
                       <a:srgbClr val="FFFFFF"/>
                     </a:solidFill>
@@ -7004,10 +7443,17 @@
                     <a:lstStyle/>
                     <a:p>
                       <a:pPr algn="ctr"/>
-                      <a:endParaRPr sz="1400"/>
-                    </a:p>
-                  </a:txBody>
-                  <a:tcPr>
+                      <a:r>
+                        <a:rPr sz="1800" b="0">
+                          <a:solidFill>
+                            <a:srgbClr val="000000"/>
+                          </a:solidFill>
+                        </a:rPr>
+                        <a:t>TUFF (43.5%)</a:t>
+                      </a:r>
+                    </a:p>
+                  </a:txBody>
+                  <a:tcPr marL="50800" marR="50800" marT="25400" marB="25400" anchor="ctr">
                     <a:solidFill>
                       <a:srgbClr val="FFFFFF"/>
                     </a:solidFill>
@@ -7019,10 +7465,17 @@
                     <a:lstStyle/>
                     <a:p>
                       <a:pPr algn="ctr"/>
-                      <a:endParaRPr sz="1400" dirty="0"/>
-                    </a:p>
-                  </a:txBody>
-                  <a:tcPr>
+                      <a:r>
+                        <a:rPr sz="1800" b="0">
+                          <a:solidFill>
+                            <a:srgbClr val="000000"/>
+                          </a:solidFill>
+                        </a:rPr>
+                        <a:t>34.8%</a:t>
+                      </a:r>
+                    </a:p>
+                  </a:txBody>
+                  <a:tcPr marL="50800" marR="50800" marT="25400" marB="25400" anchor="ctr">
                     <a:solidFill>
                       <a:srgbClr val="FFFFFF"/>
                     </a:solidFill>
@@ -7034,10 +7487,17 @@
                     <a:lstStyle/>
                     <a:p>
                       <a:pPr algn="ctr"/>
-                      <a:endParaRPr sz="1400"/>
-                    </a:p>
-                  </a:txBody>
-                  <a:tcPr>
+                      <a:r>
+                        <a:rPr sz="1800" b="0">
+                          <a:solidFill>
+                            <a:srgbClr val="000000"/>
+                          </a:solidFill>
+                        </a:rPr>
+                        <a:t>COVER 2 (43.5%)</a:t>
+                      </a:r>
+                    </a:p>
+                  </a:txBody>
+                  <a:tcPr marL="50800" marR="50800" marT="25400" marB="25400" anchor="ctr">
                     <a:solidFill>
                       <a:srgbClr val="FFFFFF"/>
                     </a:solidFill>
@@ -7056,10 +7516,17 @@
                     <a:lstStyle/>
                     <a:p>
                       <a:pPr algn="ctr"/>
-                      <a:endParaRPr sz="1400"/>
-                    </a:p>
-                  </a:txBody>
-                  <a:tcPr>
+                      <a:r>
+                        <a:rPr sz="1800" b="0">
+                          <a:solidFill>
+                            <a:srgbClr val="000000"/>
+                          </a:solidFill>
+                        </a:rPr>
+                        <a:t>DUO</a:t>
+                      </a:r>
+                    </a:p>
+                  </a:txBody>
+                  <a:tcPr marL="50800" marR="50800" marT="25400" marB="25400" anchor="ctr">
                     <a:solidFill>
                       <a:srgbClr val="F2F2F2"/>
                     </a:solidFill>
@@ -7071,10 +7538,17 @@
                     <a:lstStyle/>
                     <a:p>
                       <a:pPr algn="ctr"/>
-                      <a:endParaRPr sz="1400"/>
-                    </a:p>
-                  </a:txBody>
-                  <a:tcPr>
+                      <a:r>
+                        <a:rPr sz="1800" b="0">
+                          <a:solidFill>
+                            <a:srgbClr val="000000"/>
+                          </a:solidFill>
+                        </a:rPr>
+                        <a:t>TUFF (63.6%)</a:t>
+                      </a:r>
+                    </a:p>
+                  </a:txBody>
+                  <a:tcPr marL="50800" marR="50800" marT="25400" marB="25400" anchor="ctr">
                     <a:solidFill>
                       <a:srgbClr val="F2F2F2"/>
                     </a:solidFill>
@@ -7086,10 +7560,17 @@
                     <a:lstStyle/>
                     <a:p>
                       <a:pPr algn="ctr"/>
-                      <a:endParaRPr sz="1400" dirty="0"/>
-                    </a:p>
-                  </a:txBody>
-                  <a:tcPr>
+                      <a:r>
+                        <a:rPr sz="1800" b="0">
+                          <a:solidFill>
+                            <a:srgbClr val="000000"/>
+                          </a:solidFill>
+                        </a:rPr>
+                        <a:t>22.7%</a:t>
+                      </a:r>
+                    </a:p>
+                  </a:txBody>
+                  <a:tcPr marL="50800" marR="50800" marT="25400" marB="25400" anchor="ctr">
                     <a:solidFill>
                       <a:srgbClr val="F2F2F2"/>
                     </a:solidFill>
@@ -7101,10 +7582,17 @@
                     <a:lstStyle/>
                     <a:p>
                       <a:pPr algn="ctr"/>
-                      <a:endParaRPr sz="1400" dirty="0"/>
-                    </a:p>
-                  </a:txBody>
-                  <a:tcPr>
+                      <a:r>
+                        <a:rPr sz="1800" b="0" dirty="0">
+                          <a:solidFill>
+                            <a:srgbClr val="000000"/>
+                          </a:solidFill>
+                        </a:rPr>
+                        <a:t>COVER 2 (59.1%)</a:t>
+                      </a:r>
+                    </a:p>
+                  </a:txBody>
+                  <a:tcPr marL="50800" marR="50800" marT="25400" marB="25400" anchor="ctr">
                     <a:solidFill>
                       <a:srgbClr val="F2F2F2"/>
                     </a:solidFill>
@@ -7123,10 +7611,17 @@
                     <a:lstStyle/>
                     <a:p>
                       <a:pPr algn="ctr"/>
-                      <a:endParaRPr sz="1400"/>
-                    </a:p>
-                  </a:txBody>
-                  <a:tcPr>
+                      <a:r>
+                        <a:rPr sz="1800" b="0">
+                          <a:solidFill>
+                            <a:srgbClr val="000000"/>
+                          </a:solidFill>
+                        </a:rPr>
+                        <a:t>TRIO</a:t>
+                      </a:r>
+                    </a:p>
+                  </a:txBody>
+                  <a:tcPr marL="50800" marR="50800" marT="25400" marB="25400" anchor="ctr">
                     <a:solidFill>
                       <a:srgbClr val="FFFFFF"/>
                     </a:solidFill>
@@ -7138,10 +7633,17 @@
                     <a:lstStyle/>
                     <a:p>
                       <a:pPr algn="ctr"/>
-                      <a:endParaRPr sz="1400"/>
-                    </a:p>
-                  </a:txBody>
-                  <a:tcPr>
+                      <a:r>
+                        <a:rPr sz="1800" b="0">
+                          <a:solidFill>
+                            <a:srgbClr val="000000"/>
+                          </a:solidFill>
+                        </a:rPr>
+                        <a:t>TUFF (57.9%)</a:t>
+                      </a:r>
+                    </a:p>
+                  </a:txBody>
+                  <a:tcPr marL="50800" marR="50800" marT="25400" marB="25400" anchor="ctr">
                     <a:solidFill>
                       <a:srgbClr val="FFFFFF"/>
                     </a:solidFill>
@@ -7153,10 +7655,17 @@
                     <a:lstStyle/>
                     <a:p>
                       <a:pPr algn="ctr"/>
-                      <a:endParaRPr sz="1400" dirty="0"/>
-                    </a:p>
-                  </a:txBody>
-                  <a:tcPr>
+                      <a:r>
+                        <a:rPr sz="1800" b="0">
+                          <a:solidFill>
+                            <a:srgbClr val="000000"/>
+                          </a:solidFill>
+                        </a:rPr>
+                        <a:t>42.1%</a:t>
+                      </a:r>
+                    </a:p>
+                  </a:txBody>
+                  <a:tcPr marL="50800" marR="50800" marT="25400" marB="25400" anchor="ctr">
                     <a:solidFill>
                       <a:srgbClr val="FFFFFF"/>
                     </a:solidFill>
@@ -7168,10 +7677,17 @@
                     <a:lstStyle/>
                     <a:p>
                       <a:pPr algn="ctr"/>
-                      <a:endParaRPr sz="1400" dirty="0"/>
-                    </a:p>
-                  </a:txBody>
-                  <a:tcPr>
+                      <a:r>
+                        <a:rPr sz="1800" b="0">
+                          <a:solidFill>
+                            <a:srgbClr val="000000"/>
+                          </a:solidFill>
+                        </a:rPr>
+                        <a:t>COVER 2 (52.6%)</a:t>
+                      </a:r>
+                    </a:p>
+                  </a:txBody>
+                  <a:tcPr marL="50800" marR="50800" marT="25400" marB="25400" anchor="ctr">
                     <a:solidFill>
                       <a:srgbClr val="FFFFFF"/>
                     </a:solidFill>
@@ -7190,10 +7706,17 @@
                     <a:lstStyle/>
                     <a:p>
                       <a:pPr algn="ctr"/>
-                      <a:endParaRPr sz="1400"/>
-                    </a:p>
-                  </a:txBody>
-                  <a:tcPr>
+                      <a:r>
+                        <a:rPr sz="1800" b="0">
+                          <a:solidFill>
+                            <a:srgbClr val="000000"/>
+                          </a:solidFill>
+                        </a:rPr>
+                        <a:t>FLIP</a:t>
+                      </a:r>
+                    </a:p>
+                  </a:txBody>
+                  <a:tcPr marL="50800" marR="50800" marT="25400" marB="25400" anchor="ctr">
                     <a:solidFill>
                       <a:srgbClr val="F2F2F2"/>
                     </a:solidFill>
@@ -7205,10 +7728,17 @@
                     <a:lstStyle/>
                     <a:p>
                       <a:pPr algn="ctr"/>
-                      <a:endParaRPr sz="1400" dirty="0"/>
-                    </a:p>
-                  </a:txBody>
-                  <a:tcPr>
+                      <a:r>
+                        <a:rPr sz="1800" b="0">
+                          <a:solidFill>
+                            <a:srgbClr val="000000"/>
+                          </a:solidFill>
+                        </a:rPr>
+                        <a:t>TUFF (46.7%)</a:t>
+                      </a:r>
+                    </a:p>
+                  </a:txBody>
+                  <a:tcPr marL="50800" marR="50800" marT="25400" marB="25400" anchor="ctr">
                     <a:solidFill>
                       <a:srgbClr val="F2F2F2"/>
                     </a:solidFill>
@@ -7220,10 +7750,17 @@
                     <a:lstStyle/>
                     <a:p>
                       <a:pPr algn="ctr"/>
-                      <a:endParaRPr sz="1400"/>
-                    </a:p>
-                  </a:txBody>
-                  <a:tcPr>
+                      <a:r>
+                        <a:rPr sz="1800" b="0">
+                          <a:solidFill>
+                            <a:srgbClr val="000000"/>
+                          </a:solidFill>
+                        </a:rPr>
+                        <a:t>26.7%</a:t>
+                      </a:r>
+                    </a:p>
+                  </a:txBody>
+                  <a:tcPr marL="50800" marR="50800" marT="25400" marB="25400" anchor="ctr">
                     <a:solidFill>
                       <a:srgbClr val="F2F2F2"/>
                     </a:solidFill>
@@ -7235,10 +7772,17 @@
                     <a:lstStyle/>
                     <a:p>
                       <a:pPr algn="ctr"/>
-                      <a:endParaRPr sz="1400" dirty="0"/>
-                    </a:p>
-                  </a:txBody>
-                  <a:tcPr>
+                      <a:r>
+                        <a:rPr sz="1800" b="0" dirty="0">
+                          <a:solidFill>
+                            <a:srgbClr val="000000"/>
+                          </a:solidFill>
+                        </a:rPr>
+                        <a:t>COVER 2 (53.3%)</a:t>
+                      </a:r>
+                    </a:p>
+                  </a:txBody>
+                  <a:tcPr marL="50800" marR="50800" marT="25400" marB="25400" anchor="ctr">
                     <a:solidFill>
                       <a:srgbClr val="F2F2F2"/>
                     </a:solidFill>
@@ -7256,69 +7800,6 @@
       </p:graphicFrame>
       <p:sp>
         <p:nvSpPr>
-          <p:cNvPr id="8" name="TextBox 7"/>
-          <p:cNvSpPr txBox="1"/>
-          <p:nvPr/>
-        </p:nvSpPr>
-        <p:spPr>
-          <a:xfrm>
-            <a:off x="5969000" y="889000"/>
-            <a:ext cx="2921000" cy="3175000"/>
-          </a:xfrm>
-          <a:prstGeom prst="rect">
-            <a:avLst/>
-          </a:prstGeom>
-          <a:noFill/>
-        </p:spPr>
-        <p:txBody>
-          <a:bodyPr wrap="none">
-            <a:spAutoFit/>
-          </a:bodyPr>
-          <a:lstStyle/>
-          <a:p>
-            <a:pPr>
-              <a:defRPr sz="1600" b="1"/>
-            </a:pPr>
-            <a:r>
-              <a:t>Key Takeaways</a:t>
-            </a:r>
-          </a:p>
-          <a:p>
-            <a:pPr lvl="1">
-              <a:defRPr sz="1200"/>
-            </a:pPr>
-            <a:r>
-              <a:t>🔥 Highlight tendencies ≥60%</a:t>
-            </a:r>
-          </a:p>
-          <a:p>
-            <a:pPr lvl="1">
-              <a:defRPr sz="1200"/>
-            </a:pPr>
-            <a:r>
-              <a:t>⚠️ Pressure alerts</a:t>
-            </a:r>
-          </a:p>
-          <a:p>
-            <a:pPr lvl="1">
-              <a:defRPr sz="1200"/>
-            </a:pPr>
-            <a:r>
-              <a:t>🛑 Red zone notes</a:t>
-            </a:r>
-          </a:p>
-          <a:p>
-            <a:pPr lvl="1">
-              <a:defRPr sz="1200"/>
-            </a:pPr>
-            <a:r>
-              <a:t>AI-generated summary</a:t>
-            </a:r>
-          </a:p>
-        </p:txBody>
-      </p:sp>
-      <p:sp>
-        <p:nvSpPr>
           <p:cNvPr id="10" name="TextBox 9">
             <a:extLst>
               <a:ext uri="{FF2B5EF4-FFF2-40B4-BE49-F238E27FC236}">
@@ -7346,11 +7827,14 @@
           <a:lstStyle/>
           <a:p>
             <a:pPr>
-              <a:defRPr sz="1100"/>
+              <a:defRPr sz="1100">
+                <a:solidFill>
+                  <a:srgbClr val="000000"/>
+                </a:solidFill>
+              </a:defRPr>
             </a:pPr>
             <a:r>
-              <a:rPr dirty="0"/>
-              <a:t>Opponent: ____________</a:t>
+              <a:t>Opponent: River Falls    Date: 07/30/2026</a:t>
             </a:r>
           </a:p>
         </p:txBody>
